--- a/企画書.pptx
+++ b/企画書.pptx
@@ -108,7 +108,150 @@
       </a:defRPr>
     </a:lvl9pPr>
   </p:defaultTextStyle>
+  <p:extLst>
+    <p:ext uri="{EFAFB233-063F-42B5-8137-9DF3F51BA10A}">
+      <p15:sldGuideLst xmlns:p15="http://schemas.microsoft.com/office/powerpoint/2012/main"/>
+    </p:ext>
+  </p:extLst>
 </p:presentation>
+</file>
+
+<file path=ppt/changesInfos/changesInfo1.xml><?xml version="1.0" encoding="utf-8"?>
+<pc:chgInfo xmlns:a="http://schemas.openxmlformats.org/drawingml/2006/main" xmlns:r="http://schemas.openxmlformats.org/officeDocument/2006/relationships" xmlns:ac="http://schemas.microsoft.com/office/drawing/2013/main/command" xmlns:pc="http://schemas.microsoft.com/office/powerpoint/2013/main/command">
+  <pc:docChgLst>
+    <pc:chgData name="黒沢　爽次" userId="fae486ef-0c84-45a4-a237-2d2b758b0e89" providerId="ADAL" clId="{0C035BAC-995D-4CFD-B6CF-8BC7828293FF}"/>
+    <pc:docChg chg="modSld">
+      <pc:chgData name="黒沢　爽次" userId="fae486ef-0c84-45a4-a237-2d2b758b0e89" providerId="ADAL" clId="{0C035BAC-995D-4CFD-B6CF-8BC7828293FF}" dt="2026-06-01T03:10:55.689" v="164" actId="1076"/>
+      <pc:docMkLst>
+        <pc:docMk/>
+      </pc:docMkLst>
+      <pc:sldChg chg="modSp mod">
+        <pc:chgData name="黒沢　爽次" userId="fae486ef-0c84-45a4-a237-2d2b758b0e89" providerId="ADAL" clId="{0C035BAC-995D-4CFD-B6CF-8BC7828293FF}" dt="2026-06-01T03:01:47.258" v="8" actId="1076"/>
+        <pc:sldMkLst>
+          <pc:docMk/>
+          <pc:sldMk cId="2848011945" sldId="257"/>
+        </pc:sldMkLst>
+        <pc:spChg chg="mod">
+          <ac:chgData name="黒沢　爽次" userId="fae486ef-0c84-45a4-a237-2d2b758b0e89" providerId="ADAL" clId="{0C035BAC-995D-4CFD-B6CF-8BC7828293FF}" dt="2026-06-01T03:01:40.438" v="6" actId="255"/>
+          <ac:spMkLst>
+            <pc:docMk/>
+            <pc:sldMk cId="2848011945" sldId="257"/>
+            <ac:spMk id="4" creationId="{487D966B-013A-4819-BAB5-2729C1561034}"/>
+          </ac:spMkLst>
+        </pc:spChg>
+        <pc:spChg chg="mod">
+          <ac:chgData name="黒沢　爽次" userId="fae486ef-0c84-45a4-a237-2d2b758b0e89" providerId="ADAL" clId="{0C035BAC-995D-4CFD-B6CF-8BC7828293FF}" dt="2026-06-01T03:01:47.258" v="8" actId="1076"/>
+          <ac:spMkLst>
+            <pc:docMk/>
+            <pc:sldMk cId="2848011945" sldId="257"/>
+            <ac:spMk id="5" creationId="{ADCBECC7-ADB5-4635-B1D6-C5EC2A2B3AFB}"/>
+          </ac:spMkLst>
+        </pc:spChg>
+      </pc:sldChg>
+      <pc:sldChg chg="modSp mod">
+        <pc:chgData name="黒沢　爽次" userId="fae486ef-0c84-45a4-a237-2d2b758b0e89" providerId="ADAL" clId="{0C035BAC-995D-4CFD-B6CF-8BC7828293FF}" dt="2026-06-01T03:02:16.285" v="13" actId="1076"/>
+        <pc:sldMkLst>
+          <pc:docMk/>
+          <pc:sldMk cId="4156189418" sldId="258"/>
+        </pc:sldMkLst>
+        <pc:spChg chg="mod">
+          <ac:chgData name="黒沢　爽次" userId="fae486ef-0c84-45a4-a237-2d2b758b0e89" providerId="ADAL" clId="{0C035BAC-995D-4CFD-B6CF-8BC7828293FF}" dt="2026-06-01T03:02:16.285" v="13" actId="1076"/>
+          <ac:spMkLst>
+            <pc:docMk/>
+            <pc:sldMk cId="4156189418" sldId="258"/>
+            <ac:spMk id="3" creationId="{118619B7-19AA-45A2-9B78-F6B50A1881C4}"/>
+          </ac:spMkLst>
+        </pc:spChg>
+        <pc:spChg chg="mod">
+          <ac:chgData name="黒沢　爽次" userId="fae486ef-0c84-45a4-a237-2d2b758b0e89" providerId="ADAL" clId="{0C035BAC-995D-4CFD-B6CF-8BC7828293FF}" dt="2026-06-01T03:02:06.343" v="10" actId="1076"/>
+          <ac:spMkLst>
+            <pc:docMk/>
+            <pc:sldMk cId="4156189418" sldId="258"/>
+            <ac:spMk id="4" creationId="{17FE17C3-F876-41EF-A708-88654E647DDB}"/>
+          </ac:spMkLst>
+        </pc:spChg>
+        <pc:spChg chg="mod">
+          <ac:chgData name="黒沢　爽次" userId="fae486ef-0c84-45a4-a237-2d2b758b0e89" providerId="ADAL" clId="{0C035BAC-995D-4CFD-B6CF-8BC7828293FF}" dt="2026-06-01T03:02:09.244" v="11" actId="1076"/>
+          <ac:spMkLst>
+            <pc:docMk/>
+            <pc:sldMk cId="4156189418" sldId="258"/>
+            <ac:spMk id="5" creationId="{9D3EAC84-B18D-4456-9B76-104023807AC0}"/>
+          </ac:spMkLst>
+        </pc:spChg>
+        <pc:spChg chg="mod">
+          <ac:chgData name="黒沢　爽次" userId="fae486ef-0c84-45a4-a237-2d2b758b0e89" providerId="ADAL" clId="{0C035BAC-995D-4CFD-B6CF-8BC7828293FF}" dt="2026-06-01T03:02:13.470" v="12" actId="1076"/>
+          <ac:spMkLst>
+            <pc:docMk/>
+            <pc:sldMk cId="4156189418" sldId="258"/>
+            <ac:spMk id="6" creationId="{9418049C-A96D-4881-935E-98083CD43F01}"/>
+          </ac:spMkLst>
+        </pc:spChg>
+      </pc:sldChg>
+      <pc:sldChg chg="modSp mod">
+        <pc:chgData name="黒沢　爽次" userId="fae486ef-0c84-45a4-a237-2d2b758b0e89" providerId="ADAL" clId="{0C035BAC-995D-4CFD-B6CF-8BC7828293FF}" dt="2026-06-01T03:02:49.545" v="14" actId="1076"/>
+        <pc:sldMkLst>
+          <pc:docMk/>
+          <pc:sldMk cId="1307443849" sldId="259"/>
+        </pc:sldMkLst>
+        <pc:spChg chg="mod">
+          <ac:chgData name="黒沢　爽次" userId="fae486ef-0c84-45a4-a237-2d2b758b0e89" providerId="ADAL" clId="{0C035BAC-995D-4CFD-B6CF-8BC7828293FF}" dt="2026-06-01T03:02:49.545" v="14" actId="1076"/>
+          <ac:spMkLst>
+            <pc:docMk/>
+            <pc:sldMk cId="1307443849" sldId="259"/>
+            <ac:spMk id="4" creationId="{CF3C4FDD-75F6-4F2E-896B-60443778DEF0}"/>
+          </ac:spMkLst>
+        </pc:spChg>
+        <pc:spChg chg="mod">
+          <ac:chgData name="黒沢　爽次" userId="fae486ef-0c84-45a4-a237-2d2b758b0e89" providerId="ADAL" clId="{0C035BAC-995D-4CFD-B6CF-8BC7828293FF}" dt="2026-06-01T03:02:49.545" v="14" actId="1076"/>
+          <ac:spMkLst>
+            <pc:docMk/>
+            <pc:sldMk cId="1307443849" sldId="259"/>
+            <ac:spMk id="5" creationId="{2FD27ABA-3101-4524-A7A1-82D2ADC0B222}"/>
+          </ac:spMkLst>
+        </pc:spChg>
+      </pc:sldChg>
+      <pc:sldChg chg="addSp modSp mod">
+        <pc:chgData name="黒沢　爽次" userId="fae486ef-0c84-45a4-a237-2d2b758b0e89" providerId="ADAL" clId="{0C035BAC-995D-4CFD-B6CF-8BC7828293FF}" dt="2026-06-01T03:10:55.689" v="164" actId="1076"/>
+        <pc:sldMkLst>
+          <pc:docMk/>
+          <pc:sldMk cId="1739049540" sldId="260"/>
+        </pc:sldMkLst>
+        <pc:spChg chg="mod">
+          <ac:chgData name="黒沢　爽次" userId="fae486ef-0c84-45a4-a237-2d2b758b0e89" providerId="ADAL" clId="{0C035BAC-995D-4CFD-B6CF-8BC7828293FF}" dt="2026-06-01T03:07:47.360" v="15" actId="1076"/>
+          <ac:spMkLst>
+            <pc:docMk/>
+            <pc:sldMk cId="1739049540" sldId="260"/>
+            <ac:spMk id="3" creationId="{7758727A-ABCD-4AE1-A884-2B239A154C15}"/>
+          </ac:spMkLst>
+        </pc:spChg>
+        <pc:spChg chg="add mod">
+          <ac:chgData name="黒沢　爽次" userId="fae486ef-0c84-45a4-a237-2d2b758b0e89" providerId="ADAL" clId="{0C035BAC-995D-4CFD-B6CF-8BC7828293FF}" dt="2026-06-01T03:10:55.689" v="164" actId="1076"/>
+          <ac:spMkLst>
+            <pc:docMk/>
+            <pc:sldMk cId="1739049540" sldId="260"/>
+            <ac:spMk id="4" creationId="{35F046AC-DD02-4AE7-81FE-74B099ECFFEC}"/>
+          </ac:spMkLst>
+        </pc:spChg>
+        <pc:spChg chg="add mod">
+          <ac:chgData name="黒沢　爽次" userId="fae486ef-0c84-45a4-a237-2d2b758b0e89" providerId="ADAL" clId="{0C035BAC-995D-4CFD-B6CF-8BC7828293FF}" dt="2026-06-01T03:10:55.689" v="164" actId="1076"/>
+          <ac:spMkLst>
+            <pc:docMk/>
+            <pc:sldMk cId="1739049540" sldId="260"/>
+            <ac:spMk id="5" creationId="{86781BE4-258B-48FC-A5B4-3E69D740E54A}"/>
+          </ac:spMkLst>
+        </pc:spChg>
+        <pc:spChg chg="add mod">
+          <ac:chgData name="黒沢　爽次" userId="fae486ef-0c84-45a4-a237-2d2b758b0e89" providerId="ADAL" clId="{0C035BAC-995D-4CFD-B6CF-8BC7828293FF}" dt="2026-06-01T03:10:46.173" v="161" actId="1076"/>
+          <ac:spMkLst>
+            <pc:docMk/>
+            <pc:sldMk cId="1739049540" sldId="260"/>
+            <ac:spMk id="6" creationId="{1B2088B2-9353-4CE1-95C2-828CFDAA5837}"/>
+          </ac:spMkLst>
+        </pc:spChg>
+      </pc:sldChg>
+    </pc:docChg>
+  </pc:docChgLst>
+</pc:chgInfo>
 </file>
 
 <file path=ppt/slideLayouts/slideLayout1.xml><?xml version="1.0" encoding="utf-8"?>
@@ -258,7 +401,7 @@
           <a:p>
             <a:fld id="{E5390CA5-D828-4F12-AC34-EB78105EA812}" type="datetimeFigureOut">
               <a:rPr kumimoji="1" lang="ja-JP" altLang="en-US" smtClean="0"/>
-              <a:t>2026/5/28</a:t>
+              <a:t>2026/6/1</a:t>
             </a:fld>
             <a:endParaRPr kumimoji="1" lang="ja-JP" altLang="en-US"/>
           </a:p>
@@ -488,7 +631,7 @@
           <a:p>
             <a:fld id="{E5390CA5-D828-4F12-AC34-EB78105EA812}" type="datetimeFigureOut">
               <a:rPr kumimoji="1" lang="ja-JP" altLang="en-US" smtClean="0"/>
-              <a:t>2026/5/28</a:t>
+              <a:t>2026/6/1</a:t>
             </a:fld>
             <a:endParaRPr kumimoji="1" lang="ja-JP" altLang="en-US"/>
           </a:p>
@@ -728,7 +871,7 @@
           <a:p>
             <a:fld id="{E5390CA5-D828-4F12-AC34-EB78105EA812}" type="datetimeFigureOut">
               <a:rPr kumimoji="1" lang="ja-JP" altLang="en-US" smtClean="0"/>
-              <a:t>2026/5/28</a:t>
+              <a:t>2026/6/1</a:t>
             </a:fld>
             <a:endParaRPr kumimoji="1" lang="ja-JP" altLang="en-US"/>
           </a:p>
@@ -958,7 +1101,7 @@
           <a:p>
             <a:fld id="{E5390CA5-D828-4F12-AC34-EB78105EA812}" type="datetimeFigureOut">
               <a:rPr kumimoji="1" lang="ja-JP" altLang="en-US" smtClean="0"/>
-              <a:t>2026/5/28</a:t>
+              <a:t>2026/6/1</a:t>
             </a:fld>
             <a:endParaRPr kumimoji="1" lang="ja-JP" altLang="en-US"/>
           </a:p>
@@ -1233,7 +1376,7 @@
           <a:p>
             <a:fld id="{E5390CA5-D828-4F12-AC34-EB78105EA812}" type="datetimeFigureOut">
               <a:rPr kumimoji="1" lang="ja-JP" altLang="en-US" smtClean="0"/>
-              <a:t>2026/5/28</a:t>
+              <a:t>2026/6/1</a:t>
             </a:fld>
             <a:endParaRPr kumimoji="1" lang="ja-JP" altLang="en-US"/>
           </a:p>
@@ -1562,7 +1705,7 @@
           <a:p>
             <a:fld id="{E5390CA5-D828-4F12-AC34-EB78105EA812}" type="datetimeFigureOut">
               <a:rPr kumimoji="1" lang="ja-JP" altLang="en-US" smtClean="0"/>
-              <a:t>2026/5/28</a:t>
+              <a:t>2026/6/1</a:t>
             </a:fld>
             <a:endParaRPr kumimoji="1" lang="ja-JP" altLang="en-US"/>
           </a:p>
@@ -2038,7 +2181,7 @@
           <a:p>
             <a:fld id="{E5390CA5-D828-4F12-AC34-EB78105EA812}" type="datetimeFigureOut">
               <a:rPr kumimoji="1" lang="ja-JP" altLang="en-US" smtClean="0"/>
-              <a:t>2026/5/28</a:t>
+              <a:t>2026/6/1</a:t>
             </a:fld>
             <a:endParaRPr kumimoji="1" lang="ja-JP" altLang="en-US"/>
           </a:p>
@@ -2179,7 +2322,7 @@
           <a:p>
             <a:fld id="{E5390CA5-D828-4F12-AC34-EB78105EA812}" type="datetimeFigureOut">
               <a:rPr kumimoji="1" lang="ja-JP" altLang="en-US" smtClean="0"/>
-              <a:t>2026/5/28</a:t>
+              <a:t>2026/6/1</a:t>
             </a:fld>
             <a:endParaRPr kumimoji="1" lang="ja-JP" altLang="en-US"/>
           </a:p>
@@ -2292,7 +2435,7 @@
           <a:p>
             <a:fld id="{E5390CA5-D828-4F12-AC34-EB78105EA812}" type="datetimeFigureOut">
               <a:rPr kumimoji="1" lang="ja-JP" altLang="en-US" smtClean="0"/>
-              <a:t>2026/5/28</a:t>
+              <a:t>2026/6/1</a:t>
             </a:fld>
             <a:endParaRPr kumimoji="1" lang="ja-JP" altLang="en-US"/>
           </a:p>
@@ -2635,7 +2778,7 @@
           <a:p>
             <a:fld id="{E5390CA5-D828-4F12-AC34-EB78105EA812}" type="datetimeFigureOut">
               <a:rPr kumimoji="1" lang="ja-JP" altLang="en-US" smtClean="0"/>
-              <a:t>2026/5/28</a:t>
+              <a:t>2026/6/1</a:t>
             </a:fld>
             <a:endParaRPr kumimoji="1" lang="ja-JP" altLang="en-US"/>
           </a:p>
@@ -2923,7 +3066,7 @@
           <a:p>
             <a:fld id="{E5390CA5-D828-4F12-AC34-EB78105EA812}" type="datetimeFigureOut">
               <a:rPr kumimoji="1" lang="ja-JP" altLang="en-US" smtClean="0"/>
-              <a:t>2026/5/28</a:t>
+              <a:t>2026/6/1</a:t>
             </a:fld>
             <a:endParaRPr kumimoji="1" lang="ja-JP" altLang="en-US"/>
           </a:p>
@@ -3196,7 +3339,7 @@
           <a:p>
             <a:fld id="{E5390CA5-D828-4F12-AC34-EB78105EA812}" type="datetimeFigureOut">
               <a:rPr kumimoji="1" lang="ja-JP" altLang="en-US" smtClean="0"/>
-              <a:t>2026/5/28</a:t>
+              <a:t>2026/6/1</a:t>
             </a:fld>
             <a:endParaRPr kumimoji="1" lang="ja-JP" altLang="en-US"/>
           </a:p>
@@ -3693,8 +3836,8 @@
         </p:nvSpPr>
         <p:spPr>
           <a:xfrm>
-            <a:off x="1606378" y="1680519"/>
-            <a:ext cx="1338828" cy="369332"/>
+            <a:off x="1136821" y="976184"/>
+            <a:ext cx="3262432" cy="830997"/>
           </a:xfrm>
           <a:prstGeom prst="rect">
             <a:avLst/>
@@ -3708,7 +3851,7 @@
           <a:lstStyle/>
           <a:p>
             <a:r>
-              <a:rPr kumimoji="1" lang="ja-JP" altLang="en-US" dirty="0"/>
+              <a:rPr kumimoji="1" lang="ja-JP" altLang="en-US" sz="4800" u="sng" dirty="0"/>
               <a:t>コンセプト</a:t>
             </a:r>
           </a:p>
@@ -3728,8 +3871,8 @@
         </p:nvSpPr>
         <p:spPr>
           <a:xfrm>
-            <a:off x="2409568" y="2533135"/>
-            <a:ext cx="4570482" cy="369332"/>
+            <a:off x="2105164" y="3136612"/>
+            <a:ext cx="7981672" cy="584775"/>
           </a:xfrm>
           <a:prstGeom prst="rect">
             <a:avLst/>
@@ -3743,7 +3886,7 @@
           <a:lstStyle/>
           <a:p>
             <a:r>
-              <a:rPr kumimoji="1" lang="ja-JP" altLang="en-US" dirty="0"/>
+              <a:rPr kumimoji="1" lang="ja-JP" altLang="en-US" sz="3200" dirty="0"/>
               <a:t>攻撃をしない・されないアクションゲーム</a:t>
             </a:r>
           </a:p>
@@ -3828,7 +3971,7 @@
         </p:nvSpPr>
         <p:spPr>
           <a:xfrm>
-            <a:off x="902044" y="2199503"/>
+            <a:off x="1235676" y="2575506"/>
             <a:ext cx="4015946" cy="461665"/>
           </a:xfrm>
           <a:prstGeom prst="rect">
@@ -3863,7 +4006,7 @@
         </p:nvSpPr>
         <p:spPr>
           <a:xfrm>
-            <a:off x="902044" y="3369554"/>
+            <a:off x="1223339" y="3718105"/>
             <a:ext cx="4786185" cy="830997"/>
           </a:xfrm>
           <a:prstGeom prst="rect">
@@ -3898,7 +4041,7 @@
         </p:nvSpPr>
         <p:spPr>
           <a:xfrm>
-            <a:off x="6503773" y="3369554"/>
+            <a:off x="6652054" y="3902770"/>
             <a:ext cx="4493538" cy="461665"/>
           </a:xfrm>
           <a:prstGeom prst="rect">
@@ -3933,7 +4076,7 @@
         </p:nvSpPr>
         <p:spPr>
           <a:xfrm>
-            <a:off x="1235676" y="5029200"/>
+            <a:off x="3616431" y="5311977"/>
             <a:ext cx="6032421" cy="461665"/>
           </a:xfrm>
           <a:prstGeom prst="rect">
@@ -4139,7 +4282,7 @@
         </p:nvSpPr>
         <p:spPr>
           <a:xfrm>
-            <a:off x="1285103" y="3941805"/>
+            <a:off x="1022359" y="3940083"/>
             <a:ext cx="9623147" cy="584775"/>
           </a:xfrm>
           <a:prstGeom prst="rect">
@@ -4182,7 +4325,7 @@
         </p:nvSpPr>
         <p:spPr>
           <a:xfrm>
-            <a:off x="1729946" y="4707924"/>
+            <a:off x="1467202" y="4706202"/>
             <a:ext cx="2627642" cy="830997"/>
           </a:xfrm>
           <a:prstGeom prst="rect">
@@ -4306,7 +4449,7 @@
         </p:nvSpPr>
         <p:spPr>
           <a:xfrm>
-            <a:off x="1594022" y="2187145"/>
+            <a:off x="1569308" y="1890583"/>
             <a:ext cx="3550972" cy="1200329"/>
           </a:xfrm>
           <a:prstGeom prst="rect">
@@ -4349,6 +4492,112 @@
             <a:r>
               <a:rPr kumimoji="1" lang="ja-JP" altLang="en-US" sz="2400" dirty="0"/>
               <a:t>アイテムを持つ、使う</a:t>
+            </a:r>
+          </a:p>
+        </p:txBody>
+      </p:sp>
+      <p:sp>
+        <p:nvSpPr>
+          <p:cNvPr id="4" name="テキスト ボックス 3">
+            <a:extLst>
+              <a:ext uri="{FF2B5EF4-FFF2-40B4-BE49-F238E27FC236}">
+                <a16:creationId xmlns:a16="http://schemas.microsoft.com/office/drawing/2014/main" id="{35F046AC-DD02-4AE7-81FE-74B099ECFFEC}"/>
+              </a:ext>
+            </a:extLst>
+          </p:cNvPr>
+          <p:cNvSpPr txBox="1"/>
+          <p:nvPr/>
+        </p:nvSpPr>
+        <p:spPr>
+          <a:xfrm>
+            <a:off x="1569308" y="4705806"/>
+            <a:ext cx="5109091" cy="461665"/>
+          </a:xfrm>
+          <a:prstGeom prst="rect">
+            <a:avLst/>
+          </a:prstGeom>
+          <a:noFill/>
+        </p:spPr>
+        <p:txBody>
+          <a:bodyPr wrap="none" rtlCol="0">
+            <a:spAutoFit/>
+          </a:bodyPr>
+          <a:lstStyle/>
+          <a:p>
+            <a:r>
+              <a:rPr lang="ja-JP" altLang="en-US" sz="2400" dirty="0"/>
+              <a:t>１ステージにつき数分間の制限時間</a:t>
+            </a:r>
+            <a:endParaRPr kumimoji="1" lang="ja-JP" altLang="en-US" sz="2400" dirty="0"/>
+          </a:p>
+        </p:txBody>
+      </p:sp>
+      <p:sp>
+        <p:nvSpPr>
+          <p:cNvPr id="5" name="テキスト ボックス 4">
+            <a:extLst>
+              <a:ext uri="{FF2B5EF4-FFF2-40B4-BE49-F238E27FC236}">
+                <a16:creationId xmlns:a16="http://schemas.microsoft.com/office/drawing/2014/main" id="{86781BE4-258B-48FC-A5B4-3E69D740E54A}"/>
+              </a:ext>
+            </a:extLst>
+          </p:cNvPr>
+          <p:cNvSpPr txBox="1"/>
+          <p:nvPr/>
+        </p:nvSpPr>
+        <p:spPr>
+          <a:xfrm>
+            <a:off x="1569308" y="5432508"/>
+            <a:ext cx="5724644" cy="461665"/>
+          </a:xfrm>
+          <a:prstGeom prst="rect">
+            <a:avLst/>
+          </a:prstGeom>
+          <a:noFill/>
+        </p:spPr>
+        <p:txBody>
+          <a:bodyPr wrap="none" rtlCol="0">
+            <a:spAutoFit/>
+          </a:bodyPr>
+          <a:lstStyle/>
+          <a:p>
+            <a:r>
+              <a:rPr kumimoji="1" lang="ja-JP" altLang="en-US" sz="2400" dirty="0"/>
+              <a:t>ステージクリアで新ステージアンロック</a:t>
+            </a:r>
+          </a:p>
+        </p:txBody>
+      </p:sp>
+      <p:sp>
+        <p:nvSpPr>
+          <p:cNvPr id="6" name="テキスト ボックス 5">
+            <a:extLst>
+              <a:ext uri="{FF2B5EF4-FFF2-40B4-BE49-F238E27FC236}">
+                <a16:creationId xmlns:a16="http://schemas.microsoft.com/office/drawing/2014/main" id="{1B2088B2-9353-4CE1-95C2-828CFDAA5837}"/>
+              </a:ext>
+            </a:extLst>
+          </p:cNvPr>
+          <p:cNvSpPr txBox="1"/>
+          <p:nvPr/>
+        </p:nvSpPr>
+        <p:spPr>
+          <a:xfrm>
+            <a:off x="889686" y="3841229"/>
+            <a:ext cx="1005403" cy="584775"/>
+          </a:xfrm>
+          <a:prstGeom prst="rect">
+            <a:avLst/>
+          </a:prstGeom>
+          <a:noFill/>
+        </p:spPr>
+        <p:txBody>
+          <a:bodyPr wrap="none" rtlCol="0">
+            <a:spAutoFit/>
+          </a:bodyPr>
+          <a:lstStyle/>
+          <a:p>
+            <a:r>
+              <a:rPr kumimoji="1" lang="ja-JP" altLang="en-US" sz="3200" u="sng" dirty="0"/>
+              <a:t>仕様</a:t>
             </a:r>
           </a:p>
         </p:txBody>

--- a/企画書.pptx
+++ b/企画書.pptx
@@ -121,12 +121,12 @@
   <pc:docChgLst>
     <pc:chgData name="黒沢　爽次" userId="fae486ef-0c84-45a4-a237-2d2b758b0e89" providerId="ADAL" clId="{0C035BAC-995D-4CFD-B6CF-8BC7828293FF}"/>
     <pc:docChg chg="modSld">
-      <pc:chgData name="黒沢　爽次" userId="fae486ef-0c84-45a4-a237-2d2b758b0e89" providerId="ADAL" clId="{0C035BAC-995D-4CFD-B6CF-8BC7828293FF}" dt="2026-06-01T03:10:55.689" v="164" actId="1076"/>
+      <pc:chgData name="黒沢　爽次" userId="fae486ef-0c84-45a4-a237-2d2b758b0e89" providerId="ADAL" clId="{0C035BAC-995D-4CFD-B6CF-8BC7828293FF}" dt="2026-06-02T00:42:50.045" v="168" actId="20577"/>
       <pc:docMkLst>
         <pc:docMk/>
       </pc:docMkLst>
       <pc:sldChg chg="modSp mod">
-        <pc:chgData name="黒沢　爽次" userId="fae486ef-0c84-45a4-a237-2d2b758b0e89" providerId="ADAL" clId="{0C035BAC-995D-4CFD-B6CF-8BC7828293FF}" dt="2026-06-01T03:01:47.258" v="8" actId="1076"/>
+        <pc:chgData name="黒沢　爽次" userId="fae486ef-0c84-45a4-a237-2d2b758b0e89" providerId="ADAL" clId="{0C035BAC-995D-4CFD-B6CF-8BC7828293FF}" dt="2026-06-02T00:42:50.045" v="168" actId="20577"/>
         <pc:sldMkLst>
           <pc:docMk/>
           <pc:sldMk cId="2848011945" sldId="257"/>
@@ -140,7 +140,7 @@
           </ac:spMkLst>
         </pc:spChg>
         <pc:spChg chg="mod">
-          <ac:chgData name="黒沢　爽次" userId="fae486ef-0c84-45a4-a237-2d2b758b0e89" providerId="ADAL" clId="{0C035BAC-995D-4CFD-B6CF-8BC7828293FF}" dt="2026-06-01T03:01:47.258" v="8" actId="1076"/>
+          <ac:chgData name="黒沢　爽次" userId="fae486ef-0c84-45a4-a237-2d2b758b0e89" providerId="ADAL" clId="{0C035BAC-995D-4CFD-B6CF-8BC7828293FF}" dt="2026-06-02T00:42:50.045" v="168" actId="20577"/>
           <ac:spMkLst>
             <pc:docMk/>
             <pc:sldMk cId="2848011945" sldId="257"/>
@@ -401,7 +401,7 @@
           <a:p>
             <a:fld id="{E5390CA5-D828-4F12-AC34-EB78105EA812}" type="datetimeFigureOut">
               <a:rPr kumimoji="1" lang="ja-JP" altLang="en-US" smtClean="0"/>
-              <a:t>2026/6/1</a:t>
+              <a:t>2026/6/2</a:t>
             </a:fld>
             <a:endParaRPr kumimoji="1" lang="ja-JP" altLang="en-US"/>
           </a:p>
@@ -631,7 +631,7 @@
           <a:p>
             <a:fld id="{E5390CA5-D828-4F12-AC34-EB78105EA812}" type="datetimeFigureOut">
               <a:rPr kumimoji="1" lang="ja-JP" altLang="en-US" smtClean="0"/>
-              <a:t>2026/6/1</a:t>
+              <a:t>2026/6/2</a:t>
             </a:fld>
             <a:endParaRPr kumimoji="1" lang="ja-JP" altLang="en-US"/>
           </a:p>
@@ -871,7 +871,7 @@
           <a:p>
             <a:fld id="{E5390CA5-D828-4F12-AC34-EB78105EA812}" type="datetimeFigureOut">
               <a:rPr kumimoji="1" lang="ja-JP" altLang="en-US" smtClean="0"/>
-              <a:t>2026/6/1</a:t>
+              <a:t>2026/6/2</a:t>
             </a:fld>
             <a:endParaRPr kumimoji="1" lang="ja-JP" altLang="en-US"/>
           </a:p>
@@ -1101,7 +1101,7 @@
           <a:p>
             <a:fld id="{E5390CA5-D828-4F12-AC34-EB78105EA812}" type="datetimeFigureOut">
               <a:rPr kumimoji="1" lang="ja-JP" altLang="en-US" smtClean="0"/>
-              <a:t>2026/6/1</a:t>
+              <a:t>2026/6/2</a:t>
             </a:fld>
             <a:endParaRPr kumimoji="1" lang="ja-JP" altLang="en-US"/>
           </a:p>
@@ -1376,7 +1376,7 @@
           <a:p>
             <a:fld id="{E5390CA5-D828-4F12-AC34-EB78105EA812}" type="datetimeFigureOut">
               <a:rPr kumimoji="1" lang="ja-JP" altLang="en-US" smtClean="0"/>
-              <a:t>2026/6/1</a:t>
+              <a:t>2026/6/2</a:t>
             </a:fld>
             <a:endParaRPr kumimoji="1" lang="ja-JP" altLang="en-US"/>
           </a:p>
@@ -1705,7 +1705,7 @@
           <a:p>
             <a:fld id="{E5390CA5-D828-4F12-AC34-EB78105EA812}" type="datetimeFigureOut">
               <a:rPr kumimoji="1" lang="ja-JP" altLang="en-US" smtClean="0"/>
-              <a:t>2026/6/1</a:t>
+              <a:t>2026/6/2</a:t>
             </a:fld>
             <a:endParaRPr kumimoji="1" lang="ja-JP" altLang="en-US"/>
           </a:p>
@@ -2181,7 +2181,7 @@
           <a:p>
             <a:fld id="{E5390CA5-D828-4F12-AC34-EB78105EA812}" type="datetimeFigureOut">
               <a:rPr kumimoji="1" lang="ja-JP" altLang="en-US" smtClean="0"/>
-              <a:t>2026/6/1</a:t>
+              <a:t>2026/6/2</a:t>
             </a:fld>
             <a:endParaRPr kumimoji="1" lang="ja-JP" altLang="en-US"/>
           </a:p>
@@ -2322,7 +2322,7 @@
           <a:p>
             <a:fld id="{E5390CA5-D828-4F12-AC34-EB78105EA812}" type="datetimeFigureOut">
               <a:rPr kumimoji="1" lang="ja-JP" altLang="en-US" smtClean="0"/>
-              <a:t>2026/6/1</a:t>
+              <a:t>2026/6/2</a:t>
             </a:fld>
             <a:endParaRPr kumimoji="1" lang="ja-JP" altLang="en-US"/>
           </a:p>
@@ -2435,7 +2435,7 @@
           <a:p>
             <a:fld id="{E5390CA5-D828-4F12-AC34-EB78105EA812}" type="datetimeFigureOut">
               <a:rPr kumimoji="1" lang="ja-JP" altLang="en-US" smtClean="0"/>
-              <a:t>2026/6/1</a:t>
+              <a:t>2026/6/2</a:t>
             </a:fld>
             <a:endParaRPr kumimoji="1" lang="ja-JP" altLang="en-US"/>
           </a:p>
@@ -2778,7 +2778,7 @@
           <a:p>
             <a:fld id="{E5390CA5-D828-4F12-AC34-EB78105EA812}" type="datetimeFigureOut">
               <a:rPr kumimoji="1" lang="ja-JP" altLang="en-US" smtClean="0"/>
-              <a:t>2026/6/1</a:t>
+              <a:t>2026/6/2</a:t>
             </a:fld>
             <a:endParaRPr kumimoji="1" lang="ja-JP" altLang="en-US"/>
           </a:p>
@@ -3066,7 +3066,7 @@
           <a:p>
             <a:fld id="{E5390CA5-D828-4F12-AC34-EB78105EA812}" type="datetimeFigureOut">
               <a:rPr kumimoji="1" lang="ja-JP" altLang="en-US" smtClean="0"/>
-              <a:t>2026/6/1</a:t>
+              <a:t>2026/6/2</a:t>
             </a:fld>
             <a:endParaRPr kumimoji="1" lang="ja-JP" altLang="en-US"/>
           </a:p>
@@ -3339,7 +3339,7 @@
           <a:p>
             <a:fld id="{E5390CA5-D828-4F12-AC34-EB78105EA812}" type="datetimeFigureOut">
               <a:rPr kumimoji="1" lang="ja-JP" altLang="en-US" smtClean="0"/>
-              <a:t>2026/6/1</a:t>
+              <a:t>2026/6/2</a:t>
             </a:fld>
             <a:endParaRPr kumimoji="1" lang="ja-JP" altLang="en-US"/>
           </a:p>
@@ -3872,7 +3872,7 @@
         <p:spPr>
           <a:xfrm>
             <a:off x="2105164" y="3136612"/>
-            <a:ext cx="7981672" cy="584775"/>
+            <a:ext cx="8515473" cy="584775"/>
           </a:xfrm>
           <a:prstGeom prst="rect">
             <a:avLst/>
@@ -3887,7 +3887,15 @@
           <a:p>
             <a:r>
               <a:rPr kumimoji="1" lang="ja-JP" altLang="en-US" sz="3200" dirty="0"/>
-              <a:t>攻撃をしない・されないアクションゲーム</a:t>
+              <a:t>攻撃をしない・されない</a:t>
+            </a:r>
+            <a:r>
+              <a:rPr kumimoji="1" lang="en-US" altLang="ja-JP" sz="3200" dirty="0"/>
+              <a:t>3D</a:t>
+            </a:r>
+            <a:r>
+              <a:rPr kumimoji="1" lang="ja-JP" altLang="en-US" sz="3200" dirty="0"/>
+              <a:t>アクションゲーム</a:t>
             </a:r>
           </a:p>
         </p:txBody>

--- a/企画書.pptx
+++ b/企画書.pptx
@@ -6,10 +6,10 @@
   </p:sldMasterIdLst>
   <p:sldIdLst>
     <p:sldId id="256" r:id="rId2"/>
-    <p:sldId id="257" r:id="rId3"/>
+    <p:sldId id="260" r:id="rId3"/>
     <p:sldId id="258" r:id="rId4"/>
     <p:sldId id="259" r:id="rId5"/>
-    <p:sldId id="260" r:id="rId6"/>
+    <p:sldId id="261" r:id="rId6"/>
   </p:sldIdLst>
   <p:sldSz cx="12192000" cy="6858000"/>
   <p:notesSz cx="6858000" cy="9144000"/>
@@ -120,19 +120,143 @@
 <pc:chgInfo xmlns:a="http://schemas.openxmlformats.org/drawingml/2006/main" xmlns:r="http://schemas.openxmlformats.org/officeDocument/2006/relationships" xmlns:ac="http://schemas.microsoft.com/office/drawing/2013/main/command" xmlns:pc="http://schemas.microsoft.com/office/powerpoint/2013/main/command">
   <pc:docChgLst>
     <pc:chgData name="黒沢　爽次" userId="fae486ef-0c84-45a4-a237-2d2b758b0e89" providerId="ADAL" clId="{0C035BAC-995D-4CFD-B6CF-8BC7828293FF}"/>
-    <pc:docChg chg="modSld">
-      <pc:chgData name="黒沢　爽次" userId="fae486ef-0c84-45a4-a237-2d2b758b0e89" providerId="ADAL" clId="{0C035BAC-995D-4CFD-B6CF-8BC7828293FF}" dt="2026-06-02T00:42:50.045" v="168" actId="20577"/>
+    <pc:docChg chg="undo custSel addSld delSld modSld">
+      <pc:chgData name="黒沢　爽次" userId="fae486ef-0c84-45a4-a237-2d2b758b0e89" providerId="ADAL" clId="{0C035BAC-995D-4CFD-B6CF-8BC7828293FF}" dt="2026-06-02T02:47:09.406" v="2588" actId="1076"/>
       <pc:docMkLst>
         <pc:docMk/>
       </pc:docMkLst>
-      <pc:sldChg chg="modSp mod">
-        <pc:chgData name="黒沢　爽次" userId="fae486ef-0c84-45a4-a237-2d2b758b0e89" providerId="ADAL" clId="{0C035BAC-995D-4CFD-B6CF-8BC7828293FF}" dt="2026-06-02T00:42:50.045" v="168" actId="20577"/>
+      <pc:sldChg chg="new del">
+        <pc:chgData name="黒沢　爽次" userId="fae486ef-0c84-45a4-a237-2d2b758b0e89" providerId="ADAL" clId="{0C035BAC-995D-4CFD-B6CF-8BC7828293FF}" dt="2026-06-02T01:00:09.146" v="279" actId="2696"/>
+        <pc:sldMkLst>
+          <pc:docMk/>
+          <pc:sldMk cId="144757072" sldId="256"/>
+        </pc:sldMkLst>
+      </pc:sldChg>
+      <pc:sldChg chg="addSp delSp modSp new mod">
+        <pc:chgData name="黒沢　爽次" userId="fae486ef-0c84-45a4-a237-2d2b758b0e89" providerId="ADAL" clId="{0C035BAC-995D-4CFD-B6CF-8BC7828293FF}" dt="2026-06-02T02:21:29.614" v="2005" actId="21"/>
+        <pc:sldMkLst>
+          <pc:docMk/>
+          <pc:sldMk cId="2394309603" sldId="256"/>
+        </pc:sldMkLst>
+        <pc:spChg chg="add mod">
+          <ac:chgData name="黒沢　爽次" userId="fae486ef-0c84-45a4-a237-2d2b758b0e89" providerId="ADAL" clId="{0C035BAC-995D-4CFD-B6CF-8BC7828293FF}" dt="2026-06-02T01:54:29.768" v="1290" actId="20577"/>
+          <ac:spMkLst>
+            <pc:docMk/>
+            <pc:sldMk cId="2394309603" sldId="256"/>
+            <ac:spMk id="2" creationId="{813B2122-4236-47F3-8B86-2049F75D9514}"/>
+          </ac:spMkLst>
+        </pc:spChg>
+        <pc:spChg chg="add del mod">
+          <ac:chgData name="黒沢　爽次" userId="fae486ef-0c84-45a4-a237-2d2b758b0e89" providerId="ADAL" clId="{0C035BAC-995D-4CFD-B6CF-8BC7828293FF}" dt="2026-06-02T02:21:29.614" v="2005" actId="21"/>
+          <ac:spMkLst>
+            <pc:docMk/>
+            <pc:sldMk cId="2394309603" sldId="256"/>
+            <ac:spMk id="3" creationId="{601EA969-D9C4-4BE4-9257-2AFAE88BA8FC}"/>
+          </ac:spMkLst>
+        </pc:spChg>
+      </pc:sldChg>
+      <pc:sldChg chg="del">
+        <pc:chgData name="黒沢　爽次" userId="fae486ef-0c84-45a4-a237-2d2b758b0e89" providerId="ADAL" clId="{0C035BAC-995D-4CFD-B6CF-8BC7828293FF}" dt="2026-06-02T01:00:03.783" v="277" actId="2696"/>
+        <pc:sldMkLst>
+          <pc:docMk/>
+          <pc:sldMk cId="4124237014" sldId="256"/>
+        </pc:sldMkLst>
+      </pc:sldChg>
+      <pc:sldChg chg="addSp modSp new del mod">
+        <pc:chgData name="黒沢　爽次" userId="fae486ef-0c84-45a4-a237-2d2b758b0e89" providerId="ADAL" clId="{0C035BAC-995D-4CFD-B6CF-8BC7828293FF}" dt="2026-06-02T01:53:58.264" v="1263" actId="2696"/>
+        <pc:sldMkLst>
+          <pc:docMk/>
+          <pc:sldMk cId="885284438" sldId="257"/>
+        </pc:sldMkLst>
+        <pc:spChg chg="add mod">
+          <ac:chgData name="黒沢　爽次" userId="fae486ef-0c84-45a4-a237-2d2b758b0e89" providerId="ADAL" clId="{0C035BAC-995D-4CFD-B6CF-8BC7828293FF}" dt="2026-06-02T01:36:26.593" v="949" actId="1076"/>
+          <ac:spMkLst>
+            <pc:docMk/>
+            <pc:sldMk cId="885284438" sldId="257"/>
+            <ac:spMk id="2" creationId="{CF5E4B47-424B-4941-8615-BC68D15DD90E}"/>
+          </ac:spMkLst>
+        </pc:spChg>
+        <pc:spChg chg="add mod">
+          <ac:chgData name="黒沢　爽次" userId="fae486ef-0c84-45a4-a237-2d2b758b0e89" providerId="ADAL" clId="{0C035BAC-995D-4CFD-B6CF-8BC7828293FF}" dt="2026-06-02T01:36:26.593" v="949" actId="1076"/>
+          <ac:spMkLst>
+            <pc:docMk/>
+            <pc:sldMk cId="885284438" sldId="257"/>
+            <ac:spMk id="3" creationId="{2DCE0C8D-C3D1-4788-B95B-724D5E688D4E}"/>
+          </ac:spMkLst>
+        </pc:spChg>
+        <pc:spChg chg="add mod">
+          <ac:chgData name="黒沢　爽次" userId="fae486ef-0c84-45a4-a237-2d2b758b0e89" providerId="ADAL" clId="{0C035BAC-995D-4CFD-B6CF-8BC7828293FF}" dt="2026-06-02T01:39:51.071" v="975" actId="14100"/>
+          <ac:spMkLst>
+            <pc:docMk/>
+            <pc:sldMk cId="885284438" sldId="257"/>
+            <ac:spMk id="4" creationId="{DDA4BB7F-39F4-4877-AFC9-579243D1BCE5}"/>
+          </ac:spMkLst>
+        </pc:spChg>
+        <pc:picChg chg="add mod">
+          <ac:chgData name="黒沢　爽次" userId="fae486ef-0c84-45a4-a237-2d2b758b0e89" providerId="ADAL" clId="{0C035BAC-995D-4CFD-B6CF-8BC7828293FF}" dt="2026-06-02T01:37:04.780" v="955" actId="1076"/>
+          <ac:picMkLst>
+            <pc:docMk/>
+            <pc:sldMk cId="885284438" sldId="257"/>
+            <ac:picMk id="5" creationId="{56ADEC43-8ECC-4673-A415-94C9F107EEA2}"/>
+          </ac:picMkLst>
+        </pc:picChg>
+        <pc:picChg chg="add mod">
+          <ac:chgData name="黒沢　爽次" userId="fae486ef-0c84-45a4-a237-2d2b758b0e89" providerId="ADAL" clId="{0C035BAC-995D-4CFD-B6CF-8BC7828293FF}" dt="2026-06-02T01:38:42.766" v="962" actId="1076"/>
+          <ac:picMkLst>
+            <pc:docMk/>
+            <pc:sldMk cId="885284438" sldId="257"/>
+            <ac:picMk id="6" creationId="{61637EC6-99D4-4966-B583-D9F4706FF050}"/>
+          </ac:picMkLst>
+        </pc:picChg>
+        <pc:picChg chg="add mod">
+          <ac:chgData name="黒沢　爽次" userId="fae486ef-0c84-45a4-a237-2d2b758b0e89" providerId="ADAL" clId="{0C035BAC-995D-4CFD-B6CF-8BC7828293FF}" dt="2026-06-02T01:37:06.277" v="956" actId="1076"/>
+          <ac:picMkLst>
+            <pc:docMk/>
+            <pc:sldMk cId="885284438" sldId="257"/>
+            <ac:picMk id="1026" creationId="{FC023D62-CB01-4D64-9396-097C899CAEB8}"/>
+          </ac:picMkLst>
+        </pc:picChg>
+        <pc:picChg chg="add mod">
+          <ac:chgData name="黒沢　爽次" userId="fae486ef-0c84-45a4-a237-2d2b758b0e89" providerId="ADAL" clId="{0C035BAC-995D-4CFD-B6CF-8BC7828293FF}" dt="2026-06-02T01:39:30.954" v="972" actId="1076"/>
+          <ac:picMkLst>
+            <pc:docMk/>
+            <pc:sldMk cId="885284438" sldId="257"/>
+            <ac:picMk id="1028" creationId="{18A692DF-872D-4A30-9F0F-454750943D13}"/>
+          </ac:picMkLst>
+        </pc:picChg>
+        <pc:picChg chg="add mod">
+          <ac:chgData name="黒沢　爽次" userId="fae486ef-0c84-45a4-a237-2d2b758b0e89" providerId="ADAL" clId="{0C035BAC-995D-4CFD-B6CF-8BC7828293FF}" dt="2026-06-02T01:39:07.781" v="964" actId="1076"/>
+          <ac:picMkLst>
+            <pc:docMk/>
+            <pc:sldMk cId="885284438" sldId="257"/>
+            <ac:picMk id="1030" creationId="{E2027077-4CC0-4118-BCD0-47C50DEBA895}"/>
+          </ac:picMkLst>
+        </pc:picChg>
+      </pc:sldChg>
+      <pc:sldChg chg="addSp modSp del mod">
+        <pc:chgData name="黒沢　爽次" userId="fae486ef-0c84-45a4-a237-2d2b758b0e89" providerId="ADAL" clId="{0C035BAC-995D-4CFD-B6CF-8BC7828293FF}" dt="2026-06-02T01:00:03.783" v="277" actId="2696"/>
         <pc:sldMkLst>
           <pc:docMk/>
           <pc:sldMk cId="2848011945" sldId="257"/>
         </pc:sldMkLst>
+        <pc:spChg chg="add mod">
+          <ac:chgData name="黒沢　爽次" userId="fae486ef-0c84-45a4-a237-2d2b758b0e89" providerId="ADAL" clId="{0C035BAC-995D-4CFD-B6CF-8BC7828293FF}" dt="2026-06-02T00:44:33.740" v="185" actId="1076"/>
+          <ac:spMkLst>
+            <pc:docMk/>
+            <pc:sldMk cId="2848011945" sldId="257"/>
+            <ac:spMk id="2" creationId="{8B2395D4-5758-423F-AE99-E8E9803FB495}"/>
+          </ac:spMkLst>
+        </pc:spChg>
+        <pc:spChg chg="add mod">
+          <ac:chgData name="黒沢　爽次" userId="fae486ef-0c84-45a4-a237-2d2b758b0e89" providerId="ADAL" clId="{0C035BAC-995D-4CFD-B6CF-8BC7828293FF}" dt="2026-06-02T00:49:57.257" v="276" actId="255"/>
+          <ac:spMkLst>
+            <pc:docMk/>
+            <pc:sldMk cId="2848011945" sldId="257"/>
+            <ac:spMk id="3" creationId="{AB70AD91-C2CA-474F-92F7-927D2636F347}"/>
+          </ac:spMkLst>
+        </pc:spChg>
         <pc:spChg chg="mod">
-          <ac:chgData name="黒沢　爽次" userId="fae486ef-0c84-45a4-a237-2d2b758b0e89" providerId="ADAL" clId="{0C035BAC-995D-4CFD-B6CF-8BC7828293FF}" dt="2026-06-01T03:01:40.438" v="6" actId="255"/>
+          <ac:chgData name="黒沢　爽次" userId="fae486ef-0c84-45a4-a237-2d2b758b0e89" providerId="ADAL" clId="{0C035BAC-995D-4CFD-B6CF-8BC7828293FF}" dt="2026-06-02T00:44:05.774" v="169" actId="1076"/>
           <ac:spMkLst>
             <pc:docMk/>
             <pc:sldMk cId="2848011945" sldId="257"/>
@@ -140,7 +264,7 @@
           </ac:spMkLst>
         </pc:spChg>
         <pc:spChg chg="mod">
-          <ac:chgData name="黒沢　爽次" userId="fae486ef-0c84-45a4-a237-2d2b758b0e89" providerId="ADAL" clId="{0C035BAC-995D-4CFD-B6CF-8BC7828293FF}" dt="2026-06-02T00:42:50.045" v="168" actId="20577"/>
+          <ac:chgData name="黒沢　爽次" userId="fae486ef-0c84-45a4-a237-2d2b758b0e89" providerId="ADAL" clId="{0C035BAC-995D-4CFD-B6CF-8BC7828293FF}" dt="2026-06-02T00:44:08.899" v="170" actId="1076"/>
           <ac:spMkLst>
             <pc:docMk/>
             <pc:sldMk cId="2848011945" sldId="257"/>
@@ -148,8 +272,109 @@
           </ac:spMkLst>
         </pc:spChg>
       </pc:sldChg>
-      <pc:sldChg chg="modSp mod">
-        <pc:chgData name="黒沢　爽次" userId="fae486ef-0c84-45a4-a237-2d2b758b0e89" providerId="ADAL" clId="{0C035BAC-995D-4CFD-B6CF-8BC7828293FF}" dt="2026-06-01T03:02:16.285" v="13" actId="1076"/>
+      <pc:sldChg chg="addSp delSp modSp new del mod">
+        <pc:chgData name="黒沢　爽次" userId="fae486ef-0c84-45a4-a237-2d2b758b0e89" providerId="ADAL" clId="{0C035BAC-995D-4CFD-B6CF-8BC7828293FF}" dt="2026-06-02T02:13:04.947" v="1602" actId="2696"/>
+        <pc:sldMkLst>
+          <pc:docMk/>
+          <pc:sldMk cId="2945370834" sldId="257"/>
+        </pc:sldMkLst>
+        <pc:spChg chg="add del mod">
+          <ac:chgData name="黒沢　爽次" userId="fae486ef-0c84-45a4-a237-2d2b758b0e89" providerId="ADAL" clId="{0C035BAC-995D-4CFD-B6CF-8BC7828293FF}" dt="2026-06-02T02:13:00.652" v="1600" actId="21"/>
+          <ac:spMkLst>
+            <pc:docMk/>
+            <pc:sldMk cId="2945370834" sldId="257"/>
+            <ac:spMk id="2" creationId="{2B74F7FD-43E3-4A37-9F8A-5E7B0B51F94D}"/>
+          </ac:spMkLst>
+        </pc:spChg>
+      </pc:sldChg>
+      <pc:sldChg chg="addSp modSp new del mod">
+        <pc:chgData name="黒沢　爽次" userId="fae486ef-0c84-45a4-a237-2d2b758b0e89" providerId="ADAL" clId="{0C035BAC-995D-4CFD-B6CF-8BC7828293FF}" dt="2026-06-02T01:53:58.264" v="1263" actId="2696"/>
+        <pc:sldMkLst>
+          <pc:docMk/>
+          <pc:sldMk cId="1212089665" sldId="258"/>
+        </pc:sldMkLst>
+        <pc:spChg chg="add mod">
+          <ac:chgData name="黒沢　爽次" userId="fae486ef-0c84-45a4-a237-2d2b758b0e89" providerId="ADAL" clId="{0C035BAC-995D-4CFD-B6CF-8BC7828293FF}" dt="2026-06-02T01:26:58.745" v="459" actId="1076"/>
+          <ac:spMkLst>
+            <pc:docMk/>
+            <pc:sldMk cId="1212089665" sldId="258"/>
+            <ac:spMk id="2" creationId="{116673F6-2F21-4CC1-A97C-EB356FB4F865}"/>
+          </ac:spMkLst>
+        </pc:spChg>
+        <pc:spChg chg="add mod">
+          <ac:chgData name="黒沢　爽次" userId="fae486ef-0c84-45a4-a237-2d2b758b0e89" providerId="ADAL" clId="{0C035BAC-995D-4CFD-B6CF-8BC7828293FF}" dt="2026-06-02T01:28:14.097" v="592" actId="20577"/>
+          <ac:spMkLst>
+            <pc:docMk/>
+            <pc:sldMk cId="1212089665" sldId="258"/>
+            <ac:spMk id="3" creationId="{AC8BC048-166B-4CAA-9110-1A974E807995}"/>
+          </ac:spMkLst>
+        </pc:spChg>
+        <pc:spChg chg="add mod">
+          <ac:chgData name="黒沢　爽次" userId="fae486ef-0c84-45a4-a237-2d2b758b0e89" providerId="ADAL" clId="{0C035BAC-995D-4CFD-B6CF-8BC7828293FF}" dt="2026-06-02T01:34:08.468" v="752" actId="1076"/>
+          <ac:spMkLst>
+            <pc:docMk/>
+            <pc:sldMk cId="1212089665" sldId="258"/>
+            <ac:spMk id="4" creationId="{7DCB3415-76EA-4B11-8FE4-266ADF8FC8A8}"/>
+          </ac:spMkLst>
+        </pc:spChg>
+        <pc:spChg chg="add mod">
+          <ac:chgData name="黒沢　爽次" userId="fae486ef-0c84-45a4-a237-2d2b758b0e89" providerId="ADAL" clId="{0C035BAC-995D-4CFD-B6CF-8BC7828293FF}" dt="2026-06-02T01:34:56.837" v="804" actId="20577"/>
+          <ac:spMkLst>
+            <pc:docMk/>
+            <pc:sldMk cId="1212089665" sldId="258"/>
+            <ac:spMk id="5" creationId="{B5A52EAD-BFB5-4DA9-83FD-42C7C00FA6C1}"/>
+          </ac:spMkLst>
+        </pc:spChg>
+      </pc:sldChg>
+      <pc:sldChg chg="addSp delSp modSp new mod">
+        <pc:chgData name="黒沢　爽次" userId="fae486ef-0c84-45a4-a237-2d2b758b0e89" providerId="ADAL" clId="{0C035BAC-995D-4CFD-B6CF-8BC7828293FF}" dt="2026-06-02T02:47:09.406" v="2588" actId="1076"/>
+        <pc:sldMkLst>
+          <pc:docMk/>
+          <pc:sldMk cId="3418802241" sldId="258"/>
+        </pc:sldMkLst>
+        <pc:spChg chg="add mod">
+          <ac:chgData name="黒沢　爽次" userId="fae486ef-0c84-45a4-a237-2d2b758b0e89" providerId="ADAL" clId="{0C035BAC-995D-4CFD-B6CF-8BC7828293FF}" dt="2026-06-02T02:41:31.915" v="2512" actId="115"/>
+          <ac:spMkLst>
+            <pc:docMk/>
+            <pc:sldMk cId="3418802241" sldId="258"/>
+            <ac:spMk id="2" creationId="{EEF8DA05-1DAE-4BE4-9BC0-93FC6B7F6F82}"/>
+          </ac:spMkLst>
+        </pc:spChg>
+        <pc:spChg chg="add mod">
+          <ac:chgData name="黒沢　爽次" userId="fae486ef-0c84-45a4-a237-2d2b758b0e89" providerId="ADAL" clId="{0C035BAC-995D-4CFD-B6CF-8BC7828293FF}" dt="2026-06-02T02:46:44.858" v="2585" actId="20577"/>
+          <ac:spMkLst>
+            <pc:docMk/>
+            <pc:sldMk cId="3418802241" sldId="258"/>
+            <ac:spMk id="3" creationId="{636ADBFB-B7A4-4394-B8B3-A3056217C5A8}"/>
+          </ac:spMkLst>
+        </pc:spChg>
+        <pc:spChg chg="add del mod">
+          <ac:chgData name="黒沢　爽次" userId="fae486ef-0c84-45a4-a237-2d2b758b0e89" providerId="ADAL" clId="{0C035BAC-995D-4CFD-B6CF-8BC7828293FF}" dt="2026-06-02T02:12:56.169" v="1599"/>
+          <ac:spMkLst>
+            <pc:docMk/>
+            <pc:sldMk cId="3418802241" sldId="258"/>
+            <ac:spMk id="4" creationId="{151409FB-41B9-4CDB-9EFC-B5F1C5A58DAD}"/>
+          </ac:spMkLst>
+        </pc:spChg>
+        <pc:spChg chg="add mod">
+          <ac:chgData name="黒沢　爽次" userId="fae486ef-0c84-45a4-a237-2d2b758b0e89" providerId="ADAL" clId="{0C035BAC-995D-4CFD-B6CF-8BC7828293FF}" dt="2026-06-02T02:47:09.406" v="2588" actId="1076"/>
+          <ac:spMkLst>
+            <pc:docMk/>
+            <pc:sldMk cId="3418802241" sldId="258"/>
+            <ac:spMk id="5" creationId="{2A63ABE8-D58F-4115-A464-C337E1F9C957}"/>
+          </ac:spMkLst>
+        </pc:spChg>
+        <pc:spChg chg="add mod">
+          <ac:chgData name="黒沢　爽次" userId="fae486ef-0c84-45a4-a237-2d2b758b0e89" providerId="ADAL" clId="{0C035BAC-995D-4CFD-B6CF-8BC7828293FF}" dt="2026-06-02T02:47:06.135" v="2587" actId="1076"/>
+          <ac:spMkLst>
+            <pc:docMk/>
+            <pc:sldMk cId="3418802241" sldId="258"/>
+            <ac:spMk id="6" creationId="{6E1C6284-0B4B-480D-8A52-B387E06AE6A6}"/>
+          </ac:spMkLst>
+        </pc:spChg>
+      </pc:sldChg>
+      <pc:sldChg chg="modSp del mod">
+        <pc:chgData name="黒沢　爽次" userId="fae486ef-0c84-45a4-a237-2d2b758b0e89" providerId="ADAL" clId="{0C035BAC-995D-4CFD-B6CF-8BC7828293FF}" dt="2026-06-02T01:00:03.783" v="277" actId="2696"/>
         <pc:sldMkLst>
           <pc:docMk/>
           <pc:sldMk cId="4156189418" sldId="258"/>
@@ -187,8 +412,47 @@
           </ac:spMkLst>
         </pc:spChg>
       </pc:sldChg>
-      <pc:sldChg chg="modSp mod">
-        <pc:chgData name="黒沢　爽次" userId="fae486ef-0c84-45a4-a237-2d2b758b0e89" providerId="ADAL" clId="{0C035BAC-995D-4CFD-B6CF-8BC7828293FF}" dt="2026-06-01T03:02:49.545" v="14" actId="1076"/>
+      <pc:sldChg chg="addSp modSp new mod">
+        <pc:chgData name="黒沢　爽次" userId="fae486ef-0c84-45a4-a237-2d2b758b0e89" providerId="ADAL" clId="{0C035BAC-995D-4CFD-B6CF-8BC7828293FF}" dt="2026-06-02T02:44:20.276" v="2567" actId="1076"/>
+        <pc:sldMkLst>
+          <pc:docMk/>
+          <pc:sldMk cId="136449960" sldId="259"/>
+        </pc:sldMkLst>
+        <pc:spChg chg="add mod">
+          <ac:chgData name="黒沢　爽次" userId="fae486ef-0c84-45a4-a237-2d2b758b0e89" providerId="ADAL" clId="{0C035BAC-995D-4CFD-B6CF-8BC7828293FF}" dt="2026-06-02T02:44:20.276" v="2567" actId="1076"/>
+          <ac:spMkLst>
+            <pc:docMk/>
+            <pc:sldMk cId="136449960" sldId="259"/>
+            <ac:spMk id="2" creationId="{2779B08D-8064-43E6-A331-569263D00721}"/>
+          </ac:spMkLst>
+        </pc:spChg>
+        <pc:spChg chg="add mod">
+          <ac:chgData name="黒沢　爽次" userId="fae486ef-0c84-45a4-a237-2d2b758b0e89" providerId="ADAL" clId="{0C035BAC-995D-4CFD-B6CF-8BC7828293FF}" dt="2026-06-02T02:44:20.276" v="2567" actId="1076"/>
+          <ac:spMkLst>
+            <pc:docMk/>
+            <pc:sldMk cId="136449960" sldId="259"/>
+            <ac:spMk id="3" creationId="{446EACCF-410C-4616-B677-2C0F6365C5A8}"/>
+          </ac:spMkLst>
+        </pc:spChg>
+        <pc:spChg chg="add mod">
+          <ac:chgData name="黒沢　爽次" userId="fae486ef-0c84-45a4-a237-2d2b758b0e89" providerId="ADAL" clId="{0C035BAC-995D-4CFD-B6CF-8BC7828293FF}" dt="2026-06-02T02:44:20.276" v="2567" actId="1076"/>
+          <ac:spMkLst>
+            <pc:docMk/>
+            <pc:sldMk cId="136449960" sldId="259"/>
+            <ac:spMk id="4" creationId="{61F3B039-3D78-47EB-B322-16FB7605EE6A}"/>
+          </ac:spMkLst>
+        </pc:spChg>
+        <pc:spChg chg="add mod">
+          <ac:chgData name="黒沢　爽次" userId="fae486ef-0c84-45a4-a237-2d2b758b0e89" providerId="ADAL" clId="{0C035BAC-995D-4CFD-B6CF-8BC7828293FF}" dt="2026-06-02T02:44:20.276" v="2567" actId="1076"/>
+          <ac:spMkLst>
+            <pc:docMk/>
+            <pc:sldMk cId="136449960" sldId="259"/>
+            <ac:spMk id="5" creationId="{E67A448D-99B4-4E13-98C2-ED1F929213BD}"/>
+          </ac:spMkLst>
+        </pc:spChg>
+      </pc:sldChg>
+      <pc:sldChg chg="modSp del mod">
+        <pc:chgData name="黒沢　爽次" userId="fae486ef-0c84-45a4-a237-2d2b758b0e89" providerId="ADAL" clId="{0C035BAC-995D-4CFD-B6CF-8BC7828293FF}" dt="2026-06-02T01:00:03.783" v="277" actId="2696"/>
         <pc:sldMkLst>
           <pc:docMk/>
           <pc:sldMk cId="1307443849" sldId="259"/>
@@ -210,8 +474,55 @@
           </ac:spMkLst>
         </pc:spChg>
       </pc:sldChg>
-      <pc:sldChg chg="addSp modSp mod">
-        <pc:chgData name="黒沢　爽次" userId="fae486ef-0c84-45a4-a237-2d2b758b0e89" providerId="ADAL" clId="{0C035BAC-995D-4CFD-B6CF-8BC7828293FF}" dt="2026-06-01T03:10:55.689" v="164" actId="1076"/>
+      <pc:sldChg chg="addSp modSp new del mod">
+        <pc:chgData name="黒沢　爽次" userId="fae486ef-0c84-45a4-a237-2d2b758b0e89" providerId="ADAL" clId="{0C035BAC-995D-4CFD-B6CF-8BC7828293FF}" dt="2026-06-02T01:53:58.264" v="1263" actId="2696"/>
+        <pc:sldMkLst>
+          <pc:docMk/>
+          <pc:sldMk cId="2426384250" sldId="259"/>
+        </pc:sldMkLst>
+        <pc:spChg chg="add mod">
+          <ac:chgData name="黒沢　爽次" userId="fae486ef-0c84-45a4-a237-2d2b758b0e89" providerId="ADAL" clId="{0C035BAC-995D-4CFD-B6CF-8BC7828293FF}" dt="2026-06-02T01:29:34.209" v="606" actId="20577"/>
+          <ac:spMkLst>
+            <pc:docMk/>
+            <pc:sldMk cId="2426384250" sldId="259"/>
+            <ac:spMk id="2" creationId="{0C62B13C-1B72-4483-AD8A-05820B2954C4}"/>
+          </ac:spMkLst>
+        </pc:spChg>
+        <pc:spChg chg="add mod">
+          <ac:chgData name="黒沢　爽次" userId="fae486ef-0c84-45a4-a237-2d2b758b0e89" providerId="ADAL" clId="{0C035BAC-995D-4CFD-B6CF-8BC7828293FF}" dt="2026-06-02T01:31:27.052" v="661" actId="1076"/>
+          <ac:spMkLst>
+            <pc:docMk/>
+            <pc:sldMk cId="2426384250" sldId="259"/>
+            <ac:spMk id="3" creationId="{5139BB0C-7E80-40CA-B233-E4FFF5EFF94A}"/>
+          </ac:spMkLst>
+        </pc:spChg>
+        <pc:spChg chg="add mod">
+          <ac:chgData name="黒沢　爽次" userId="fae486ef-0c84-45a4-a237-2d2b758b0e89" providerId="ADAL" clId="{0C035BAC-995D-4CFD-B6CF-8BC7828293FF}" dt="2026-06-02T01:43:49.190" v="1089" actId="1076"/>
+          <ac:spMkLst>
+            <pc:docMk/>
+            <pc:sldMk cId="2426384250" sldId="259"/>
+            <ac:spMk id="4" creationId="{BCEE3B2D-1563-49F8-9E7B-CA864A8C91F7}"/>
+          </ac:spMkLst>
+        </pc:spChg>
+        <pc:spChg chg="add mod">
+          <ac:chgData name="黒沢　爽次" userId="fae486ef-0c84-45a4-a237-2d2b758b0e89" providerId="ADAL" clId="{0C035BAC-995D-4CFD-B6CF-8BC7828293FF}" dt="2026-06-02T01:43:51.665" v="1090" actId="1076"/>
+          <ac:spMkLst>
+            <pc:docMk/>
+            <pc:sldMk cId="2426384250" sldId="259"/>
+            <ac:spMk id="5" creationId="{50940ED0-14E3-4597-A489-5FCC24824EEA}"/>
+          </ac:spMkLst>
+        </pc:spChg>
+        <pc:spChg chg="add mod">
+          <ac:chgData name="黒沢　爽次" userId="fae486ef-0c84-45a4-a237-2d2b758b0e89" providerId="ADAL" clId="{0C035BAC-995D-4CFD-B6CF-8BC7828293FF}" dt="2026-06-02T01:45:00.691" v="1262" actId="20577"/>
+          <ac:spMkLst>
+            <pc:docMk/>
+            <pc:sldMk cId="2426384250" sldId="259"/>
+            <ac:spMk id="6" creationId="{26B0520E-3023-4D07-81C0-187F29E27C17}"/>
+          </ac:spMkLst>
+        </pc:spChg>
+      </pc:sldChg>
+      <pc:sldChg chg="addSp modSp del mod">
+        <pc:chgData name="黒沢　爽次" userId="fae486ef-0c84-45a4-a237-2d2b758b0e89" providerId="ADAL" clId="{0C035BAC-995D-4CFD-B6CF-8BC7828293FF}" dt="2026-06-02T01:00:03.783" v="277" actId="2696"/>
         <pc:sldMkLst>
           <pc:docMk/>
           <pc:sldMk cId="1739049540" sldId="260"/>
@@ -246,6 +557,91 @@
             <pc:docMk/>
             <pc:sldMk cId="1739049540" sldId="260"/>
             <ac:spMk id="6" creationId="{1B2088B2-9353-4CE1-95C2-828CFDAA5837}"/>
+          </ac:spMkLst>
+        </pc:spChg>
+      </pc:sldChg>
+      <pc:sldChg chg="addSp delSp modSp new del mod">
+        <pc:chgData name="黒沢　爽次" userId="fae486ef-0c84-45a4-a237-2d2b758b0e89" providerId="ADAL" clId="{0C035BAC-995D-4CFD-B6CF-8BC7828293FF}" dt="2026-06-02T01:53:58.264" v="1263" actId="2696"/>
+        <pc:sldMkLst>
+          <pc:docMk/>
+          <pc:sldMk cId="2066569515" sldId="260"/>
+        </pc:sldMkLst>
+        <pc:spChg chg="add del mod">
+          <ac:chgData name="黒沢　爽次" userId="fae486ef-0c84-45a4-a237-2d2b758b0e89" providerId="ADAL" clId="{0C035BAC-995D-4CFD-B6CF-8BC7828293FF}" dt="2026-06-02T01:43:14.304" v="1088" actId="21"/>
+          <ac:spMkLst>
+            <pc:docMk/>
+            <pc:sldMk cId="2066569515" sldId="260"/>
+            <ac:spMk id="2" creationId="{CE74A419-66ED-4F60-BF14-A936B7C1E312}"/>
+          </ac:spMkLst>
+        </pc:spChg>
+      </pc:sldChg>
+      <pc:sldChg chg="addSp modSp new mod">
+        <pc:chgData name="黒沢　爽次" userId="fae486ef-0c84-45a4-a237-2d2b758b0e89" providerId="ADAL" clId="{0C035BAC-995D-4CFD-B6CF-8BC7828293FF}" dt="2026-06-02T02:43:29.225" v="2564" actId="20577"/>
+        <pc:sldMkLst>
+          <pc:docMk/>
+          <pc:sldMk cId="2322248786" sldId="260"/>
+        </pc:sldMkLst>
+        <pc:spChg chg="add mod">
+          <ac:chgData name="黒沢　爽次" userId="fae486ef-0c84-45a4-a237-2d2b758b0e89" providerId="ADAL" clId="{0C035BAC-995D-4CFD-B6CF-8BC7828293FF}" dt="2026-06-02T02:21:46.858" v="2045" actId="20577"/>
+          <ac:spMkLst>
+            <pc:docMk/>
+            <pc:sldMk cId="2322248786" sldId="260"/>
+            <ac:spMk id="2" creationId="{BB985023-B12E-47FC-BC3F-2CCBEFDDAEA1}"/>
+          </ac:spMkLst>
+        </pc:spChg>
+        <pc:spChg chg="add mod">
+          <ac:chgData name="黒沢　爽次" userId="fae486ef-0c84-45a4-a237-2d2b758b0e89" providerId="ADAL" clId="{0C035BAC-995D-4CFD-B6CF-8BC7828293FF}" dt="2026-06-02T02:43:29.225" v="2564" actId="20577"/>
+          <ac:spMkLst>
+            <pc:docMk/>
+            <pc:sldMk cId="2322248786" sldId="260"/>
+            <ac:spMk id="3" creationId="{29F7F138-E572-462D-9741-3BBC089C7DAC}"/>
+          </ac:spMkLst>
+        </pc:spChg>
+        <pc:spChg chg="add mod">
+          <ac:chgData name="黒沢　爽次" userId="fae486ef-0c84-45a4-a237-2d2b758b0e89" providerId="ADAL" clId="{0C035BAC-995D-4CFD-B6CF-8BC7828293FF}" dt="2026-06-02T02:41:00.349" v="2507" actId="1076"/>
+          <ac:spMkLst>
+            <pc:docMk/>
+            <pc:sldMk cId="2322248786" sldId="260"/>
+            <ac:spMk id="4" creationId="{C5DDF466-028D-4C91-9776-78FA6C2CB90B}"/>
+          </ac:spMkLst>
+        </pc:spChg>
+        <pc:spChg chg="add mod">
+          <ac:chgData name="黒沢　爽次" userId="fae486ef-0c84-45a4-a237-2d2b758b0e89" providerId="ADAL" clId="{0C035BAC-995D-4CFD-B6CF-8BC7828293FF}" dt="2026-06-02T02:40:55.557" v="2505" actId="1076"/>
+          <ac:spMkLst>
+            <pc:docMk/>
+            <pc:sldMk cId="2322248786" sldId="260"/>
+            <ac:spMk id="5" creationId="{6D678F1E-14DC-4046-BA3F-2B5620DEC7C8}"/>
+          </ac:spMkLst>
+        </pc:spChg>
+      </pc:sldChg>
+      <pc:sldChg chg="addSp delSp modSp new mod">
+        <pc:chgData name="黒沢　爽次" userId="fae486ef-0c84-45a4-a237-2d2b758b0e89" providerId="ADAL" clId="{0C035BAC-995D-4CFD-B6CF-8BC7828293FF}" dt="2026-06-02T02:44:08.135" v="2566" actId="1076"/>
+        <pc:sldMkLst>
+          <pc:docMk/>
+          <pc:sldMk cId="2995002953" sldId="261"/>
+        </pc:sldMkLst>
+        <pc:spChg chg="add mod">
+          <ac:chgData name="黒沢　爽次" userId="fae486ef-0c84-45a4-a237-2d2b758b0e89" providerId="ADAL" clId="{0C035BAC-995D-4CFD-B6CF-8BC7828293FF}" dt="2026-06-02T02:44:08.135" v="2566" actId="1076"/>
+          <ac:spMkLst>
+            <pc:docMk/>
+            <pc:sldMk cId="2995002953" sldId="261"/>
+            <ac:spMk id="2" creationId="{C025A91B-8E21-49AF-9883-33BD13B92337}"/>
+          </ac:spMkLst>
+        </pc:spChg>
+        <pc:spChg chg="add mod">
+          <ac:chgData name="黒沢　爽次" userId="fae486ef-0c84-45a4-a237-2d2b758b0e89" providerId="ADAL" clId="{0C035BAC-995D-4CFD-B6CF-8BC7828293FF}" dt="2026-06-02T02:44:01.684" v="2565" actId="2710"/>
+          <ac:spMkLst>
+            <pc:docMk/>
+            <pc:sldMk cId="2995002953" sldId="261"/>
+            <ac:spMk id="3" creationId="{F3E7AE88-25B9-4566-94BB-1E6BB9CD1FF1}"/>
+          </ac:spMkLst>
+        </pc:spChg>
+        <pc:spChg chg="add del mod">
+          <ac:chgData name="黒沢　爽次" userId="fae486ef-0c84-45a4-a237-2d2b758b0e89" providerId="ADAL" clId="{0C035BAC-995D-4CFD-B6CF-8BC7828293FF}" dt="2026-06-02T02:39:39.447" v="2461"/>
+          <ac:spMkLst>
+            <pc:docMk/>
+            <pc:sldMk cId="2995002953" sldId="261"/>
+            <ac:spMk id="4" creationId="{CE38EBA4-952E-465F-A853-88A4CF0A2415}"/>
           </ac:spMkLst>
         </pc:spChg>
       </pc:sldChg>
@@ -3758,10 +4154,10 @@
       </p:grpSpPr>
       <p:sp>
         <p:nvSpPr>
-          <p:cNvPr id="4" name="テキスト ボックス 3">
-            <a:extLst>
-              <a:ext uri="{FF2B5EF4-FFF2-40B4-BE49-F238E27FC236}">
-                <a16:creationId xmlns:a16="http://schemas.microsoft.com/office/drawing/2014/main" id="{5BFC34C5-9B54-45DF-8335-C93845324F60}"/>
+          <p:cNvPr id="2" name="テキスト ボックス 1">
+            <a:extLst>
+              <a:ext uri="{FF2B5EF4-FFF2-40B4-BE49-F238E27FC236}">
+                <a16:creationId xmlns:a16="http://schemas.microsoft.com/office/drawing/2014/main" id="{813B2122-4236-47F3-8B86-2049F75D9514}"/>
               </a:ext>
             </a:extLst>
           </p:cNvPr>
@@ -3770,8 +4166,8 @@
         </p:nvSpPr>
         <p:spPr>
           <a:xfrm>
-            <a:off x="4473146" y="2483708"/>
-            <a:ext cx="1107996" cy="369332"/>
+            <a:off x="3200400" y="3336324"/>
+            <a:ext cx="4108817" cy="369332"/>
           </a:xfrm>
           <a:prstGeom prst="rect">
             <a:avLst/>
@@ -3785,17 +4181,25 @@
           <a:lstStyle/>
           <a:p>
             <a:r>
-              <a:rPr lang="ja-JP" altLang="en-US" dirty="0"/>
-              <a:t>タイトル</a:t>
-            </a:r>
-            <a:endParaRPr kumimoji="1" lang="ja-JP" altLang="en-US" dirty="0"/>
+              <a:rPr kumimoji="1" lang="ja-JP" altLang="en-US" dirty="0"/>
+              <a:t>対戦型アクションゲーム</a:t>
+            </a:r>
+            <a:r>
+              <a:rPr kumimoji="1" lang="en-US" altLang="ja-JP" dirty="0"/>
+              <a:t>×</a:t>
+            </a:r>
+            <a:r>
+              <a:rPr kumimoji="1" lang="ja-JP" altLang="en-US" dirty="0"/>
+              <a:t>心理ゲーム</a:t>
+            </a:r>
+            <a:endParaRPr kumimoji="1" lang="en-US" altLang="ja-JP" dirty="0"/>
           </a:p>
         </p:txBody>
       </p:sp>
     </p:spTree>
     <p:extLst>
       <p:ext uri="{BB962C8B-B14F-4D97-AF65-F5344CB8AC3E}">
-        <p14:creationId xmlns:p14="http://schemas.microsoft.com/office/powerpoint/2010/main" val="4124237014"/>
+        <p14:creationId xmlns:p14="http://schemas.microsoft.com/office/powerpoint/2010/main" val="2394309603"/>
       </p:ext>
     </p:extLst>
   </p:cSld>
@@ -3824,10 +4228,10 @@
       </p:grpSpPr>
       <p:sp>
         <p:nvSpPr>
-          <p:cNvPr id="4" name="テキスト ボックス 3">
-            <a:extLst>
-              <a:ext uri="{FF2B5EF4-FFF2-40B4-BE49-F238E27FC236}">
-                <a16:creationId xmlns:a16="http://schemas.microsoft.com/office/drawing/2014/main" id="{487D966B-013A-4819-BAB5-2729C1561034}"/>
+          <p:cNvPr id="2" name="テキスト ボックス 1">
+            <a:extLst>
+              <a:ext uri="{FF2B5EF4-FFF2-40B4-BE49-F238E27FC236}">
+                <a16:creationId xmlns:a16="http://schemas.microsoft.com/office/drawing/2014/main" id="{BB985023-B12E-47FC-BC3F-2CCBEFDDAEA1}"/>
               </a:ext>
             </a:extLst>
           </p:cNvPr>
@@ -3836,8 +4240,8 @@
         </p:nvSpPr>
         <p:spPr>
           <a:xfrm>
-            <a:off x="1136821" y="976184"/>
-            <a:ext cx="3262432" cy="830997"/>
+            <a:off x="1294686" y="1346886"/>
+            <a:ext cx="6878806" cy="369332"/>
           </a:xfrm>
           <a:prstGeom prst="rect">
             <a:avLst/>
@@ -3851,18 +4255,18 @@
           <a:lstStyle/>
           <a:p>
             <a:r>
-              <a:rPr kumimoji="1" lang="ja-JP" altLang="en-US" sz="4800" u="sng" dirty="0"/>
-              <a:t>コンセプト</a:t>
-            </a:r>
-          </a:p>
-        </p:txBody>
-      </p:sp>
-      <p:sp>
-        <p:nvSpPr>
-          <p:cNvPr id="5" name="テキスト ボックス 4">
-            <a:extLst>
-              <a:ext uri="{FF2B5EF4-FFF2-40B4-BE49-F238E27FC236}">
-                <a16:creationId xmlns:a16="http://schemas.microsoft.com/office/drawing/2014/main" id="{ADCBECC7-ADB5-4635-B1D6-C5EC2A2B3AFB}"/>
+              <a:rPr kumimoji="1" lang="ja-JP" altLang="en-US" dirty="0"/>
+              <a:t>親（１人）と子（３人）に分かれて対戦する非対称型対戦ゲーム</a:t>
+            </a:r>
+          </a:p>
+        </p:txBody>
+      </p:sp>
+      <p:sp>
+        <p:nvSpPr>
+          <p:cNvPr id="3" name="テキスト ボックス 2">
+            <a:extLst>
+              <a:ext uri="{FF2B5EF4-FFF2-40B4-BE49-F238E27FC236}">
+                <a16:creationId xmlns:a16="http://schemas.microsoft.com/office/drawing/2014/main" id="{29F7F138-E572-462D-9741-3BBC089C7DAC}"/>
               </a:ext>
             </a:extLst>
           </p:cNvPr>
@@ -3871,8 +4275,8 @@
         </p:nvSpPr>
         <p:spPr>
           <a:xfrm>
-            <a:off x="2105164" y="3136612"/>
-            <a:ext cx="8515473" cy="584775"/>
+            <a:off x="1294686" y="3744782"/>
+            <a:ext cx="8494633" cy="369332"/>
           </a:xfrm>
           <a:prstGeom prst="rect">
             <a:avLst/>
@@ -3886,16 +4290,79 @@
           <a:lstStyle/>
           <a:p>
             <a:r>
-              <a:rPr kumimoji="1" lang="ja-JP" altLang="en-US" sz="3200" dirty="0"/>
-              <a:t>攻撃をしない・されない</a:t>
-            </a:r>
-            <a:r>
-              <a:rPr kumimoji="1" lang="en-US" altLang="ja-JP" sz="3200" dirty="0"/>
-              <a:t>3D</a:t>
-            </a:r>
-            <a:r>
-              <a:rPr kumimoji="1" lang="ja-JP" altLang="en-US" sz="3200" dirty="0"/>
-              <a:t>アクションゲーム</a:t>
+              <a:rPr kumimoji="1" lang="ja-JP" altLang="en-US" dirty="0"/>
+              <a:t>エリア内を自由に動き回り、射撃や打撃、キャラ固有のスキルなどで攻撃できる</a:t>
+            </a:r>
+          </a:p>
+        </p:txBody>
+      </p:sp>
+      <p:sp>
+        <p:nvSpPr>
+          <p:cNvPr id="4" name="テキスト ボックス 3">
+            <a:extLst>
+              <a:ext uri="{FF2B5EF4-FFF2-40B4-BE49-F238E27FC236}">
+                <a16:creationId xmlns:a16="http://schemas.microsoft.com/office/drawing/2014/main" id="{C5DDF466-028D-4C91-9776-78FA6C2CB90B}"/>
+              </a:ext>
+            </a:extLst>
+          </p:cNvPr>
+          <p:cNvSpPr txBox="1"/>
+          <p:nvPr/>
+        </p:nvSpPr>
+        <p:spPr>
+          <a:xfrm>
+            <a:off x="1294686" y="4943730"/>
+            <a:ext cx="7340471" cy="369332"/>
+          </a:xfrm>
+          <a:prstGeom prst="rect">
+            <a:avLst/>
+          </a:prstGeom>
+          <a:noFill/>
+        </p:spPr>
+        <p:txBody>
+          <a:bodyPr wrap="none" rtlCol="0">
+            <a:spAutoFit/>
+          </a:bodyPr>
+          <a:lstStyle/>
+          <a:p>
+            <a:r>
+              <a:rPr lang="ja-JP" altLang="en-US" dirty="0"/>
+              <a:t>特定の勝利条件を親が達成することができるかどうかで勝敗が決まる</a:t>
+            </a:r>
+            <a:endParaRPr kumimoji="1" lang="ja-JP" altLang="en-US" dirty="0"/>
+          </a:p>
+        </p:txBody>
+      </p:sp>
+      <p:sp>
+        <p:nvSpPr>
+          <p:cNvPr id="5" name="テキスト ボックス 4">
+            <a:extLst>
+              <a:ext uri="{FF2B5EF4-FFF2-40B4-BE49-F238E27FC236}">
+                <a16:creationId xmlns:a16="http://schemas.microsoft.com/office/drawing/2014/main" id="{6D678F1E-14DC-4046-BA3F-2B5620DEC7C8}"/>
+              </a:ext>
+            </a:extLst>
+          </p:cNvPr>
+          <p:cNvSpPr txBox="1"/>
+          <p:nvPr/>
+        </p:nvSpPr>
+        <p:spPr>
+          <a:xfrm>
+            <a:off x="1294686" y="2545834"/>
+            <a:ext cx="3877985" cy="369332"/>
+          </a:xfrm>
+          <a:prstGeom prst="rect">
+            <a:avLst/>
+          </a:prstGeom>
+          <a:noFill/>
+        </p:spPr>
+        <p:txBody>
+          <a:bodyPr wrap="none" rtlCol="0">
+            <a:spAutoFit/>
+          </a:bodyPr>
+          <a:lstStyle/>
+          <a:p>
+            <a:r>
+              <a:rPr kumimoji="1" lang="ja-JP" altLang="en-US" dirty="0"/>
+              <a:t>キャラクターによって性能が異なる</a:t>
             </a:r>
           </a:p>
         </p:txBody>
@@ -3903,7 +4370,7 @@
     </p:spTree>
     <p:extLst>
       <p:ext uri="{BB962C8B-B14F-4D97-AF65-F5344CB8AC3E}">
-        <p14:creationId xmlns:p14="http://schemas.microsoft.com/office/powerpoint/2010/main" val="2848011945"/>
+        <p14:creationId xmlns:p14="http://schemas.microsoft.com/office/powerpoint/2010/main" val="2322248786"/>
       </p:ext>
     </p:extLst>
   </p:cSld>
@@ -3935,7 +4402,7 @@
           <p:cNvPr id="2" name="テキスト ボックス 1">
             <a:extLst>
               <a:ext uri="{FF2B5EF4-FFF2-40B4-BE49-F238E27FC236}">
-                <a16:creationId xmlns:a16="http://schemas.microsoft.com/office/drawing/2014/main" id="{3846BFF0-4BB9-40DC-90DB-54DF34FA6A5B}"/>
+                <a16:creationId xmlns:a16="http://schemas.microsoft.com/office/drawing/2014/main" id="{EEF8DA05-1DAE-4BE4-9BC0-93FC6B7F6F82}"/>
               </a:ext>
             </a:extLst>
           </p:cNvPr>
@@ -3944,8 +4411,8 @@
         </p:nvSpPr>
         <p:spPr>
           <a:xfrm>
-            <a:off x="1235676" y="1709908"/>
-            <a:ext cx="6647974" cy="461665"/>
+            <a:off x="1569308" y="1173892"/>
+            <a:ext cx="415498" cy="369332"/>
           </a:xfrm>
           <a:prstGeom prst="rect">
             <a:avLst/>
@@ -3959,8 +4426,8 @@
           <a:lstStyle/>
           <a:p>
             <a:r>
-              <a:rPr kumimoji="1" lang="ja-JP" altLang="en-US" sz="2400" dirty="0"/>
-              <a:t>すぐやられてしまう、一方的にやられてしまう</a:t>
+              <a:rPr kumimoji="1" lang="ja-JP" altLang="en-US" u="sng" dirty="0"/>
+              <a:t>親</a:t>
             </a:r>
           </a:p>
         </p:txBody>
@@ -3970,7 +4437,7 @@
           <p:cNvPr id="3" name="テキスト ボックス 2">
             <a:extLst>
               <a:ext uri="{FF2B5EF4-FFF2-40B4-BE49-F238E27FC236}">
-                <a16:creationId xmlns:a16="http://schemas.microsoft.com/office/drawing/2014/main" id="{118619B7-19AA-45A2-9B78-F6B50A1881C4}"/>
+                <a16:creationId xmlns:a16="http://schemas.microsoft.com/office/drawing/2014/main" id="{636ADBFB-B7A4-4394-B8B3-A3056217C5A8}"/>
               </a:ext>
             </a:extLst>
           </p:cNvPr>
@@ -3979,8 +4446,8 @@
         </p:nvSpPr>
         <p:spPr>
           <a:xfrm>
-            <a:off x="1235676" y="2575506"/>
-            <a:ext cx="4015946" cy="461665"/>
+            <a:off x="1984806" y="1920790"/>
+            <a:ext cx="6647974" cy="369332"/>
           </a:xfrm>
           <a:prstGeom prst="rect">
             <a:avLst/>
@@ -3988,24 +4455,24 @@
           <a:noFill/>
         </p:spPr>
         <p:txBody>
-          <a:bodyPr wrap="square" rtlCol="0">
+          <a:bodyPr wrap="none" rtlCol="0">
             <a:spAutoFit/>
           </a:bodyPr>
           <a:lstStyle/>
           <a:p>
             <a:r>
-              <a:rPr kumimoji="1" lang="ja-JP" altLang="en-US" sz="2400" dirty="0"/>
-              <a:t>あきらめてやめてしまう</a:t>
-            </a:r>
-          </a:p>
-        </p:txBody>
-      </p:sp>
-      <p:sp>
-        <p:nvSpPr>
-          <p:cNvPr id="4" name="テキスト ボックス 3">
-            <a:extLst>
-              <a:ext uri="{FF2B5EF4-FFF2-40B4-BE49-F238E27FC236}">
-                <a16:creationId xmlns:a16="http://schemas.microsoft.com/office/drawing/2014/main" id="{17FE17C3-F876-41EF-A708-88654E647DDB}"/>
+              <a:rPr kumimoji="1" lang="ja-JP" altLang="en-US" dirty="0"/>
+              <a:t>ランダムに選ばれた勝利条件（５個程度）の中から一つ選ぶ</a:t>
+            </a:r>
+          </a:p>
+        </p:txBody>
+      </p:sp>
+      <p:sp>
+        <p:nvSpPr>
+          <p:cNvPr id="5" name="テキスト ボックス 4">
+            <a:extLst>
+              <a:ext uri="{FF2B5EF4-FFF2-40B4-BE49-F238E27FC236}">
+                <a16:creationId xmlns:a16="http://schemas.microsoft.com/office/drawing/2014/main" id="{2A63ABE8-D58F-4115-A464-C337E1F9C957}"/>
               </a:ext>
             </a:extLst>
           </p:cNvPr>
@@ -4014,8 +4481,8 @@
         </p:nvSpPr>
         <p:spPr>
           <a:xfrm>
-            <a:off x="1223339" y="3718105"/>
-            <a:ext cx="4786185" cy="830997"/>
+            <a:off x="1984806" y="3951416"/>
+            <a:ext cx="2031325" cy="369332"/>
           </a:xfrm>
           <a:prstGeom prst="rect">
             <a:avLst/>
@@ -4023,24 +4490,25 @@
           <a:noFill/>
         </p:spPr>
         <p:txBody>
-          <a:bodyPr wrap="square" rtlCol="0">
+          <a:bodyPr wrap="none" rtlCol="0">
             <a:spAutoFit/>
           </a:bodyPr>
           <a:lstStyle/>
           <a:p>
             <a:r>
-              <a:rPr kumimoji="1" lang="ja-JP" altLang="en-US" sz="2400" dirty="0"/>
-              <a:t>攻撃されない→やられてしまうことがない</a:t>
-            </a:r>
-          </a:p>
-        </p:txBody>
-      </p:sp>
-      <p:sp>
-        <p:nvSpPr>
-          <p:cNvPr id="5" name="テキスト ボックス 4">
-            <a:extLst>
-              <a:ext uri="{FF2B5EF4-FFF2-40B4-BE49-F238E27FC236}">
-                <a16:creationId xmlns:a16="http://schemas.microsoft.com/office/drawing/2014/main" id="{9D3EAC84-B18D-4456-9B76-104023807AC0}"/>
+              <a:rPr lang="ja-JP" altLang="en-US" dirty="0"/>
+              <a:t>子より体力が高い</a:t>
+            </a:r>
+            <a:endParaRPr kumimoji="1" lang="ja-JP" altLang="en-US" dirty="0"/>
+          </a:p>
+        </p:txBody>
+      </p:sp>
+      <p:sp>
+        <p:nvSpPr>
+          <p:cNvPr id="6" name="テキスト ボックス 5">
+            <a:extLst>
+              <a:ext uri="{FF2B5EF4-FFF2-40B4-BE49-F238E27FC236}">
+                <a16:creationId xmlns:a16="http://schemas.microsoft.com/office/drawing/2014/main" id="{6E1C6284-0B4B-480D-8A52-B387E06AE6A6}"/>
               </a:ext>
             </a:extLst>
           </p:cNvPr>
@@ -4049,8 +4517,8 @@
         </p:nvSpPr>
         <p:spPr>
           <a:xfrm>
-            <a:off x="6652054" y="3902770"/>
-            <a:ext cx="4493538" cy="461665"/>
+            <a:off x="1984806" y="2936103"/>
+            <a:ext cx="4801314" cy="369332"/>
           </a:xfrm>
           <a:prstGeom prst="rect">
             <a:avLst/>
@@ -4064,78 +4532,8 @@
           <a:lstStyle/>
           <a:p>
             <a:r>
-              <a:rPr kumimoji="1" lang="ja-JP" altLang="en-US" sz="2400" dirty="0"/>
-              <a:t>制限時間内は動くことができる</a:t>
-            </a:r>
-          </a:p>
-        </p:txBody>
-      </p:sp>
-      <p:sp>
-        <p:nvSpPr>
-          <p:cNvPr id="6" name="テキスト ボックス 5">
-            <a:extLst>
-              <a:ext uri="{FF2B5EF4-FFF2-40B4-BE49-F238E27FC236}">
-                <a16:creationId xmlns:a16="http://schemas.microsoft.com/office/drawing/2014/main" id="{9418049C-A96D-4881-935E-98083CD43F01}"/>
-              </a:ext>
-            </a:extLst>
-          </p:cNvPr>
-          <p:cNvSpPr txBox="1"/>
-          <p:nvPr/>
-        </p:nvSpPr>
-        <p:spPr>
-          <a:xfrm>
-            <a:off x="3616431" y="5311977"/>
-            <a:ext cx="6032421" cy="461665"/>
-          </a:xfrm>
-          <a:prstGeom prst="rect">
-            <a:avLst/>
-          </a:prstGeom>
-          <a:noFill/>
-        </p:spPr>
-        <p:txBody>
-          <a:bodyPr wrap="none" rtlCol="0">
-            <a:spAutoFit/>
-          </a:bodyPr>
-          <a:lstStyle/>
-          <a:p>
-            <a:r>
-              <a:rPr kumimoji="1" lang="ja-JP" altLang="en-US" sz="2400" dirty="0"/>
-              <a:t>あきらめてやめてしまうことが起きづらい</a:t>
-            </a:r>
-          </a:p>
-        </p:txBody>
-      </p:sp>
-      <p:sp>
-        <p:nvSpPr>
-          <p:cNvPr id="7" name="テキスト ボックス 6">
-            <a:extLst>
-              <a:ext uri="{FF2B5EF4-FFF2-40B4-BE49-F238E27FC236}">
-                <a16:creationId xmlns:a16="http://schemas.microsoft.com/office/drawing/2014/main" id="{BE9E5578-548C-4206-BED9-406304255664}"/>
-              </a:ext>
-            </a:extLst>
-          </p:cNvPr>
-          <p:cNvSpPr txBox="1"/>
-          <p:nvPr/>
-        </p:nvSpPr>
-        <p:spPr>
-          <a:xfrm>
-            <a:off x="902044" y="766119"/>
-            <a:ext cx="3877985" cy="584775"/>
-          </a:xfrm>
-          <a:prstGeom prst="rect">
-            <a:avLst/>
-          </a:prstGeom>
-          <a:noFill/>
-        </p:spPr>
-        <p:txBody>
-          <a:bodyPr wrap="none" rtlCol="0">
-            <a:spAutoFit/>
-          </a:bodyPr>
-          <a:lstStyle/>
-          <a:p>
-            <a:r>
-              <a:rPr kumimoji="1" lang="ja-JP" altLang="en-US" sz="3200" u="sng" dirty="0"/>
-              <a:t>なぜ攻撃がないのか</a:t>
+              <a:rPr kumimoji="1" lang="ja-JP" altLang="en-US" dirty="0"/>
+              <a:t>子に倒される前に勝利条件を達成すると勝ち</a:t>
             </a:r>
           </a:p>
         </p:txBody>
@@ -4143,7 +4541,7 @@
     </p:spTree>
     <p:extLst>
       <p:ext uri="{BB962C8B-B14F-4D97-AF65-F5344CB8AC3E}">
-        <p14:creationId xmlns:p14="http://schemas.microsoft.com/office/powerpoint/2010/main" val="4156189418"/>
+        <p14:creationId xmlns:p14="http://schemas.microsoft.com/office/powerpoint/2010/main" val="3418802241"/>
       </p:ext>
     </p:extLst>
   </p:cSld>
@@ -4175,7 +4573,7 @@
           <p:cNvPr id="2" name="テキスト ボックス 1">
             <a:extLst>
               <a:ext uri="{FF2B5EF4-FFF2-40B4-BE49-F238E27FC236}">
-                <a16:creationId xmlns:a16="http://schemas.microsoft.com/office/drawing/2014/main" id="{B16CA645-ABFC-4C80-9B93-D9055FF2DF05}"/>
+                <a16:creationId xmlns:a16="http://schemas.microsoft.com/office/drawing/2014/main" id="{2779B08D-8064-43E6-A331-569263D00721}"/>
               </a:ext>
             </a:extLst>
           </p:cNvPr>
@@ -4184,8 +4582,8 @@
         </p:nvSpPr>
         <p:spPr>
           <a:xfrm>
-            <a:off x="1022359" y="1025611"/>
-            <a:ext cx="5109091" cy="584775"/>
+            <a:off x="1507525" y="1309816"/>
+            <a:ext cx="415498" cy="369332"/>
           </a:xfrm>
           <a:prstGeom prst="rect">
             <a:avLst/>
@@ -4199,18 +4597,9 @@
           <a:lstStyle/>
           <a:p>
             <a:r>
-              <a:rPr kumimoji="1" lang="ja-JP" altLang="en-US" sz="3200" dirty="0"/>
-              <a:t>敵</a:t>
-            </a:r>
-            <a:r>
-              <a:rPr kumimoji="1" lang="en-US" altLang="ja-JP" sz="3200" dirty="0"/>
-              <a:t>…</a:t>
-            </a:r>
-            <a:r>
-              <a:rPr kumimoji="1" lang="ja-JP" altLang="en-US" sz="3200" dirty="0"/>
-              <a:t>攻撃はせず妨害を行う</a:t>
-            </a:r>
-            <a:endParaRPr kumimoji="1" lang="en-US" altLang="ja-JP" sz="3200" dirty="0"/>
+              <a:rPr kumimoji="1" lang="ja-JP" altLang="en-US" u="sng" dirty="0"/>
+              <a:t>子</a:t>
+            </a:r>
           </a:p>
         </p:txBody>
       </p:sp>
@@ -4219,7 +4608,7 @@
           <p:cNvPr id="3" name="テキスト ボックス 2">
             <a:extLst>
               <a:ext uri="{FF2B5EF4-FFF2-40B4-BE49-F238E27FC236}">
-                <a16:creationId xmlns:a16="http://schemas.microsoft.com/office/drawing/2014/main" id="{92A77973-260B-4B4A-A835-25FD68945EAA}"/>
+                <a16:creationId xmlns:a16="http://schemas.microsoft.com/office/drawing/2014/main" id="{446EACCF-410C-4616-B677-2C0F6365C5A8}"/>
               </a:ext>
             </a:extLst>
           </p:cNvPr>
@@ -4228,8 +4617,8 @@
         </p:nvSpPr>
         <p:spPr>
           <a:xfrm>
-            <a:off x="1594022" y="1717589"/>
-            <a:ext cx="2012089" cy="1200329"/>
+            <a:off x="1923023" y="2100649"/>
+            <a:ext cx="4801314" cy="369332"/>
           </a:xfrm>
           <a:prstGeom prst="rect">
             <a:avLst/>
@@ -4242,37 +4631,10 @@
           </a:bodyPr>
           <a:lstStyle/>
           <a:p>
-            <a:pPr marL="285750" indent="-285750">
-              <a:buFont typeface="Arial" panose="020B0604020202020204" pitchFamily="34" charset="0"/>
-              <a:buChar char="•"/>
-            </a:pPr>
-            <a:r>
-              <a:rPr kumimoji="1" lang="ja-JP" altLang="en-US" sz="2400" dirty="0"/>
-              <a:t>道をふさぐ</a:t>
-            </a:r>
-            <a:endParaRPr kumimoji="1" lang="en-US" altLang="ja-JP" sz="2400" dirty="0"/>
-          </a:p>
-          <a:p>
-            <a:pPr marL="285750" indent="-285750">
-              <a:buFont typeface="Arial" panose="020B0604020202020204" pitchFamily="34" charset="0"/>
-              <a:buChar char="•"/>
-            </a:pPr>
-            <a:r>
-              <a:rPr lang="ja-JP" altLang="en-US" sz="2400" dirty="0"/>
-              <a:t>減速させる</a:t>
-            </a:r>
-            <a:endParaRPr lang="en-US" altLang="ja-JP" sz="2400" dirty="0"/>
-          </a:p>
-          <a:p>
-            <a:pPr marL="285750" indent="-285750">
-              <a:buFont typeface="Arial" panose="020B0604020202020204" pitchFamily="34" charset="0"/>
-              <a:buChar char="•"/>
-            </a:pPr>
-            <a:r>
-              <a:rPr lang="ja-JP" altLang="en-US" sz="2400" dirty="0"/>
-              <a:t>視界を遮る</a:t>
-            </a:r>
-            <a:endParaRPr kumimoji="1" lang="ja-JP" altLang="en-US" sz="2400" dirty="0"/>
+            <a:r>
+              <a:rPr kumimoji="1" lang="ja-JP" altLang="en-US" dirty="0"/>
+              <a:t>親の勝利条件の選択肢のみ見ることができる</a:t>
+            </a:r>
           </a:p>
         </p:txBody>
       </p:sp>
@@ -4281,7 +4643,7 @@
           <p:cNvPr id="4" name="テキスト ボックス 3">
             <a:extLst>
               <a:ext uri="{FF2B5EF4-FFF2-40B4-BE49-F238E27FC236}">
-                <a16:creationId xmlns:a16="http://schemas.microsoft.com/office/drawing/2014/main" id="{CF3C4FDD-75F6-4F2E-896B-60443778DEF0}"/>
+                <a16:creationId xmlns:a16="http://schemas.microsoft.com/office/drawing/2014/main" id="{61F3B039-3D78-47EB-B322-16FB7605EE6A}"/>
               </a:ext>
             </a:extLst>
           </p:cNvPr>
@@ -4290,8 +4652,8 @@
         </p:nvSpPr>
         <p:spPr>
           <a:xfrm>
-            <a:off x="1022359" y="3940083"/>
-            <a:ext cx="9623147" cy="584775"/>
+            <a:off x="1923023" y="4361935"/>
+            <a:ext cx="4108817" cy="369332"/>
           </a:xfrm>
           <a:prstGeom prst="rect">
             <a:avLst/>
@@ -4305,16 +4667,8 @@
           <a:lstStyle/>
           <a:p>
             <a:r>
-              <a:rPr kumimoji="1" lang="ja-JP" altLang="en-US" sz="3200" dirty="0"/>
-              <a:t>プレイヤー</a:t>
-            </a:r>
-            <a:r>
-              <a:rPr kumimoji="1" lang="en-US" altLang="ja-JP" sz="3200" dirty="0"/>
-              <a:t>…</a:t>
-            </a:r>
-            <a:r>
-              <a:rPr kumimoji="1" lang="ja-JP" altLang="en-US" sz="3200" dirty="0"/>
-              <a:t>ギミックやアイテムを使い敵を無力化</a:t>
+              <a:rPr kumimoji="1" lang="ja-JP" altLang="en-US" dirty="0"/>
+              <a:t>親が勝利条件を満たす前に倒すと勝ち</a:t>
             </a:r>
           </a:p>
         </p:txBody>
@@ -4324,7 +4678,7 @@
           <p:cNvPr id="5" name="テキスト ボックス 4">
             <a:extLst>
               <a:ext uri="{FF2B5EF4-FFF2-40B4-BE49-F238E27FC236}">
-                <a16:creationId xmlns:a16="http://schemas.microsoft.com/office/drawing/2014/main" id="{2FD27ABA-3101-4524-A7A1-82D2ADC0B222}"/>
+                <a16:creationId xmlns:a16="http://schemas.microsoft.com/office/drawing/2014/main" id="{E67A448D-99B4-4E13-98C2-ED1F929213BD}"/>
               </a:ext>
             </a:extLst>
           </p:cNvPr>
@@ -4333,8 +4687,8 @@
         </p:nvSpPr>
         <p:spPr>
           <a:xfrm>
-            <a:off x="1467202" y="4706202"/>
-            <a:ext cx="2627642" cy="830997"/>
+            <a:off x="1923023" y="3231292"/>
+            <a:ext cx="5493812" cy="369332"/>
           </a:xfrm>
           <a:prstGeom prst="rect">
             <a:avLst/>
@@ -4347,33 +4701,17 @@
           </a:bodyPr>
           <a:lstStyle/>
           <a:p>
-            <a:pPr marL="285750" indent="-285750">
-              <a:buFont typeface="Arial" panose="020B0604020202020204" pitchFamily="34" charset="0"/>
-              <a:buChar char="•"/>
-            </a:pPr>
-            <a:r>
-              <a:rPr kumimoji="1" lang="ja-JP" altLang="en-US" sz="2400" dirty="0"/>
-              <a:t>スイッチを切る</a:t>
-            </a:r>
-            <a:endParaRPr kumimoji="1" lang="en-US" altLang="ja-JP" sz="2400" dirty="0"/>
-          </a:p>
-          <a:p>
-            <a:pPr marL="285750" indent="-285750">
-              <a:buFont typeface="Arial" panose="020B0604020202020204" pitchFamily="34" charset="0"/>
-              <a:buChar char="•"/>
-            </a:pPr>
-            <a:r>
-              <a:rPr lang="ja-JP" altLang="en-US" sz="2400" dirty="0"/>
-              <a:t>蓋をかぶせる</a:t>
-            </a:r>
-            <a:endParaRPr kumimoji="1" lang="ja-JP" altLang="en-US" sz="2400" dirty="0"/>
+            <a:r>
+              <a:rPr kumimoji="1" lang="ja-JP" altLang="en-US" dirty="0"/>
+              <a:t>倒されると一定時間後リスポーン（回数制限なし）</a:t>
+            </a:r>
           </a:p>
         </p:txBody>
       </p:sp>
     </p:spTree>
     <p:extLst>
       <p:ext uri="{BB962C8B-B14F-4D97-AF65-F5344CB8AC3E}">
-        <p14:creationId xmlns:p14="http://schemas.microsoft.com/office/powerpoint/2010/main" val="1307443849"/>
+        <p14:creationId xmlns:p14="http://schemas.microsoft.com/office/powerpoint/2010/main" val="136449960"/>
       </p:ext>
     </p:extLst>
   </p:cSld>
@@ -4405,7 +4743,7 @@
           <p:cNvPr id="2" name="テキスト ボックス 1">
             <a:extLst>
               <a:ext uri="{FF2B5EF4-FFF2-40B4-BE49-F238E27FC236}">
-                <a16:creationId xmlns:a16="http://schemas.microsoft.com/office/drawing/2014/main" id="{C09311E0-4A00-4708-A5A9-4DE79A1943BD}"/>
+                <a16:creationId xmlns:a16="http://schemas.microsoft.com/office/drawing/2014/main" id="{C025A91B-8E21-49AF-9883-33BD13B92337}"/>
               </a:ext>
             </a:extLst>
           </p:cNvPr>
@@ -4414,8 +4752,8 @@
         </p:nvSpPr>
         <p:spPr>
           <a:xfrm>
-            <a:off x="889686" y="963827"/>
-            <a:ext cx="6750566" cy="584775"/>
+            <a:off x="2187147" y="2309852"/>
+            <a:ext cx="1569660" cy="369332"/>
           </a:xfrm>
           <a:prstGeom prst="rect">
             <a:avLst/>
@@ -4429,16 +4767,8 @@
           <a:lstStyle/>
           <a:p>
             <a:r>
-              <a:rPr kumimoji="1" lang="ja-JP" altLang="en-US" sz="3200" u="sng" dirty="0"/>
-              <a:t>操作</a:t>
-            </a:r>
-            <a:r>
-              <a:rPr kumimoji="1" lang="en-US" altLang="ja-JP" sz="3200" u="sng" dirty="0"/>
-              <a:t>…</a:t>
-            </a:r>
-            <a:r>
-              <a:rPr kumimoji="1" lang="ja-JP" altLang="en-US" sz="3200" u="sng" dirty="0"/>
-              <a:t>遊びやすいようにシンプルに</a:t>
+              <a:rPr kumimoji="1" lang="ja-JP" altLang="en-US" u="sng" dirty="0"/>
+              <a:t>勝利条件の例</a:t>
             </a:r>
           </a:p>
         </p:txBody>
@@ -4448,7 +4778,7 @@
           <p:cNvPr id="3" name="テキスト ボックス 2">
             <a:extLst>
               <a:ext uri="{FF2B5EF4-FFF2-40B4-BE49-F238E27FC236}">
-                <a16:creationId xmlns:a16="http://schemas.microsoft.com/office/drawing/2014/main" id="{7758727A-ABCD-4AE1-A884-2B239A154C15}"/>
+                <a16:creationId xmlns:a16="http://schemas.microsoft.com/office/drawing/2014/main" id="{F3E7AE88-25B9-4566-94BB-1E6BB9CD1FF1}"/>
               </a:ext>
             </a:extLst>
           </p:cNvPr>
@@ -4457,8 +4787,8 @@
         </p:nvSpPr>
         <p:spPr>
           <a:xfrm>
-            <a:off x="1569308" y="1890583"/>
-            <a:ext cx="3550972" cy="1200329"/>
+            <a:off x="2829698" y="2828835"/>
+            <a:ext cx="3474028" cy="1715470"/>
           </a:xfrm>
           <a:prstGeom prst="rect">
             <a:avLst/>
@@ -4472,148 +4802,66 @@
           <a:lstStyle/>
           <a:p>
             <a:pPr marL="285750" indent="-285750">
+              <a:lnSpc>
+                <a:spcPct val="150000"/>
+              </a:lnSpc>
               <a:buFont typeface="Arial" panose="020B0604020202020204" pitchFamily="34" charset="0"/>
               <a:buChar char="•"/>
             </a:pPr>
             <a:r>
-              <a:rPr kumimoji="1" lang="ja-JP" altLang="en-US" sz="2400" dirty="0"/>
-              <a:t>移動</a:t>
-            </a:r>
-            <a:endParaRPr kumimoji="1" lang="en-US" altLang="ja-JP" sz="2400" dirty="0"/>
+              <a:rPr kumimoji="1" lang="ja-JP" altLang="en-US" dirty="0"/>
+              <a:t>子を〇回倒す</a:t>
+            </a:r>
+            <a:endParaRPr kumimoji="1" lang="en-US" altLang="ja-JP" dirty="0"/>
           </a:p>
           <a:p>
             <a:pPr marL="285750" indent="-285750">
+              <a:lnSpc>
+                <a:spcPct val="150000"/>
+              </a:lnSpc>
               <a:buFont typeface="Arial" panose="020B0604020202020204" pitchFamily="34" charset="0"/>
               <a:buChar char="•"/>
             </a:pPr>
             <a:r>
-              <a:rPr lang="ja-JP" altLang="en-US" sz="2400" dirty="0"/>
-              <a:t>視点回転</a:t>
-            </a:r>
-            <a:endParaRPr lang="en-US" altLang="ja-JP" sz="2400" dirty="0"/>
+              <a:rPr lang="ja-JP" altLang="en-US" dirty="0"/>
+              <a:t>〇分間生き残る</a:t>
+            </a:r>
+            <a:endParaRPr lang="en-US" altLang="ja-JP" dirty="0"/>
           </a:p>
           <a:p>
             <a:pPr marL="285750" indent="-285750">
+              <a:lnSpc>
+                <a:spcPct val="150000"/>
+              </a:lnSpc>
               <a:buFont typeface="Arial" panose="020B0604020202020204" pitchFamily="34" charset="0"/>
               <a:buChar char="•"/>
             </a:pPr>
             <a:r>
-              <a:rPr kumimoji="1" lang="ja-JP" altLang="en-US" sz="2400" dirty="0"/>
-              <a:t>アイテムを持つ、使う</a:t>
-            </a:r>
-          </a:p>
-        </p:txBody>
-      </p:sp>
-      <p:sp>
-        <p:nvSpPr>
-          <p:cNvPr id="4" name="テキスト ボックス 3">
-            <a:extLst>
-              <a:ext uri="{FF2B5EF4-FFF2-40B4-BE49-F238E27FC236}">
-                <a16:creationId xmlns:a16="http://schemas.microsoft.com/office/drawing/2014/main" id="{35F046AC-DD02-4AE7-81FE-74B099ECFFEC}"/>
-              </a:ext>
-            </a:extLst>
-          </p:cNvPr>
-          <p:cNvSpPr txBox="1"/>
-          <p:nvPr/>
-        </p:nvSpPr>
-        <p:spPr>
-          <a:xfrm>
-            <a:off x="1569308" y="4705806"/>
-            <a:ext cx="5109091" cy="461665"/>
-          </a:xfrm>
-          <a:prstGeom prst="rect">
-            <a:avLst/>
-          </a:prstGeom>
-          <a:noFill/>
-        </p:spPr>
-        <p:txBody>
-          <a:bodyPr wrap="none" rtlCol="0">
-            <a:spAutoFit/>
-          </a:bodyPr>
-          <a:lstStyle/>
-          <a:p>
-            <a:r>
-              <a:rPr lang="ja-JP" altLang="en-US" sz="2400" dirty="0"/>
-              <a:t>１ステージにつき数分間の制限時間</a:t>
-            </a:r>
-            <a:endParaRPr kumimoji="1" lang="ja-JP" altLang="en-US" sz="2400" dirty="0"/>
-          </a:p>
-        </p:txBody>
-      </p:sp>
-      <p:sp>
-        <p:nvSpPr>
-          <p:cNvPr id="5" name="テキスト ボックス 4">
-            <a:extLst>
-              <a:ext uri="{FF2B5EF4-FFF2-40B4-BE49-F238E27FC236}">
-                <a16:creationId xmlns:a16="http://schemas.microsoft.com/office/drawing/2014/main" id="{86781BE4-258B-48FC-A5B4-3E69D740E54A}"/>
-              </a:ext>
-            </a:extLst>
-          </p:cNvPr>
-          <p:cNvSpPr txBox="1"/>
-          <p:nvPr/>
-        </p:nvSpPr>
-        <p:spPr>
-          <a:xfrm>
-            <a:off x="1569308" y="5432508"/>
-            <a:ext cx="5724644" cy="461665"/>
-          </a:xfrm>
-          <a:prstGeom prst="rect">
-            <a:avLst/>
-          </a:prstGeom>
-          <a:noFill/>
-        </p:spPr>
-        <p:txBody>
-          <a:bodyPr wrap="none" rtlCol="0">
-            <a:spAutoFit/>
-          </a:bodyPr>
-          <a:lstStyle/>
-          <a:p>
-            <a:r>
-              <a:rPr kumimoji="1" lang="ja-JP" altLang="en-US" sz="2400" dirty="0"/>
-              <a:t>ステージクリアで新ステージアンロック</a:t>
-            </a:r>
-          </a:p>
-        </p:txBody>
-      </p:sp>
-      <p:sp>
-        <p:nvSpPr>
-          <p:cNvPr id="6" name="テキスト ボックス 5">
-            <a:extLst>
-              <a:ext uri="{FF2B5EF4-FFF2-40B4-BE49-F238E27FC236}">
-                <a16:creationId xmlns:a16="http://schemas.microsoft.com/office/drawing/2014/main" id="{1B2088B2-9353-4CE1-95C2-828CFDAA5837}"/>
-              </a:ext>
-            </a:extLst>
-          </p:cNvPr>
-          <p:cNvSpPr txBox="1"/>
-          <p:nvPr/>
-        </p:nvSpPr>
-        <p:spPr>
-          <a:xfrm>
-            <a:off x="889686" y="3841229"/>
-            <a:ext cx="1005403" cy="584775"/>
-          </a:xfrm>
-          <a:prstGeom prst="rect">
-            <a:avLst/>
-          </a:prstGeom>
-          <a:noFill/>
-        </p:spPr>
-        <p:txBody>
-          <a:bodyPr wrap="none" rtlCol="0">
-            <a:spAutoFit/>
-          </a:bodyPr>
-          <a:lstStyle/>
-          <a:p>
-            <a:r>
-              <a:rPr kumimoji="1" lang="ja-JP" altLang="en-US" sz="3200" u="sng" dirty="0"/>
-              <a:t>仕様</a:t>
-            </a:r>
+              <a:rPr kumimoji="1" lang="ja-JP" altLang="en-US" dirty="0"/>
+              <a:t>必殺技を〇回使う</a:t>
+            </a:r>
+            <a:endParaRPr kumimoji="1" lang="en-US" altLang="ja-JP" dirty="0"/>
+          </a:p>
+          <a:p>
+            <a:pPr marL="285750" indent="-285750">
+              <a:lnSpc>
+                <a:spcPct val="150000"/>
+              </a:lnSpc>
+              <a:buFont typeface="Arial" panose="020B0604020202020204" pitchFamily="34" charset="0"/>
+              <a:buChar char="•"/>
+            </a:pPr>
+            <a:r>
+              <a:rPr lang="ja-JP" altLang="en-US" dirty="0"/>
+              <a:t>〇秒間攻撃を受けない　など</a:t>
+            </a:r>
+            <a:endParaRPr kumimoji="1" lang="ja-JP" altLang="en-US" dirty="0"/>
           </a:p>
         </p:txBody>
       </p:sp>
     </p:spTree>
     <p:extLst>
       <p:ext uri="{BB962C8B-B14F-4D97-AF65-F5344CB8AC3E}">
-        <p14:creationId xmlns:p14="http://schemas.microsoft.com/office/powerpoint/2010/main" val="1739049540"/>
+        <p14:creationId xmlns:p14="http://schemas.microsoft.com/office/powerpoint/2010/main" val="2995002953"/>
       </p:ext>
     </p:extLst>
   </p:cSld>
